--- a/demo_sample.pptx
+++ b/demo_sample.pptx
@@ -3268,6 +3268,7 @@
                 <a:solidFill>
                   <a:srgbClr val="FFFFFF"/>
                 </a:solidFill>
+                <a:latin typeface="Meiryo UI"/>
               </a:rPr>
               <a:t>ビジネス戦略レポート 2026</a:t>
             </a:r>
@@ -3297,10 +3298,11 @@
           <a:lstStyle/>
           <a:p>
             <a:r>
-              <a:rPr sz="1300" b="0" i="0">
+              <a:rPr sz="1400" b="0" i="0">
                 <a:solidFill>
                   <a:srgbClr val="CCD8F0"/>
                 </a:solidFill>
+                <a:latin typeface="Meiryo UI"/>
               </a:rPr>
               <a:t>SALESCOREセールス戦略部門</a:t>
             </a:r>
@@ -3323,8 +3325,8 @@
         </p:blipFill>
         <p:spPr>
           <a:xfrm>
-            <a:off x="10040112" y="73152"/>
-            <a:ext cx="2011680" cy="625706"/>
+            <a:off x="9338767" y="83210"/>
+            <a:ext cx="2016252" cy="468172"/>
           </a:xfrm>
           <a:prstGeom prst="rect">
             <a:avLst/>
@@ -3339,14 +3341,14 @@
         </p:nvSpPr>
         <p:spPr>
           <a:xfrm>
-            <a:off x="0" y="6473952"/>
-            <a:ext cx="12188952" cy="15240"/>
+            <a:off x="838504" y="6355994"/>
+            <a:ext cx="10515600" cy="19050"/>
           </a:xfrm>
           <a:prstGeom prst="rect">
             <a:avLst/>
           </a:prstGeom>
           <a:solidFill>
-            <a:srgbClr val="000000"/>
+            <a:srgbClr val="1A1A1A"/>
           </a:solidFill>
           <a:ln>
             <a:noFill/>
@@ -3383,8 +3385,8 @@
         </p:nvSpPr>
         <p:spPr>
           <a:xfrm>
-            <a:off x="457200" y="6512052"/>
-            <a:ext cx="7315200" cy="320040"/>
+            <a:off x="838504" y="6400800"/>
+            <a:ext cx="6400800" cy="228600"/>
           </a:xfrm>
           <a:prstGeom prst="rect">
             <a:avLst/>
@@ -3398,12 +3400,13 @@
           <a:lstStyle/>
           <a:p>
             <a:r>
-              <a:rPr sz="800" b="0" i="0">
-                <a:solidFill>
-                  <a:srgbClr val="808080"/>
-                </a:solidFill>
-              </a:rPr>
-              <a:t>Confidential All Rights Reserved SALESCORE Inc.</a:t>
+              <a:rPr sz="900" b="0" i="0">
+                <a:solidFill>
+                  <a:srgbClr val="888888"/>
+                </a:solidFill>
+                <a:latin typeface="Meiryo UI"/>
+              </a:rPr>
+              <a:t>Confidential All Rights Reserved SALESCORE Co., Ltd.</a:t>
             </a:r>
           </a:p>
         </p:txBody>
@@ -3416,8 +3419,8 @@
         </p:nvSpPr>
         <p:spPr>
           <a:xfrm>
-            <a:off x="11640312" y="6512052"/>
-            <a:ext cx="411480" cy="320040"/>
+            <a:off x="10515600" y="6400800"/>
+            <a:ext cx="1371600" cy="228600"/>
           </a:xfrm>
           <a:prstGeom prst="rect">
             <a:avLst/>
@@ -3432,10 +3435,11 @@
           <a:p>
             <a:pPr algn="r"/>
             <a:r>
-              <a:rPr sz="900" b="0" i="0">
-                <a:solidFill>
-                  <a:srgbClr val="808080"/>
-                </a:solidFill>
+              <a:rPr sz="1200" b="0" i="0">
+                <a:solidFill>
+                  <a:srgbClr val="888888"/>
+                </a:solidFill>
+                <a:latin typeface="Meiryo UI"/>
               </a:rPr>
               <a:t>1</a:t>
             </a:r>
@@ -3512,8 +3516,8 @@
         </p:nvSpPr>
         <p:spPr>
           <a:xfrm>
-            <a:off x="457200" y="64008"/>
-            <a:ext cx="9491472" cy="219456"/>
+            <a:off x="828446" y="64008"/>
+            <a:ext cx="8686800" cy="182880"/>
           </a:xfrm>
           <a:prstGeom prst="rect">
             <a:avLst/>
@@ -3529,8 +3533,9 @@
             <a:r>
               <a:rPr sz="900" b="1" i="0">
                 <a:solidFill>
-                  <a:srgbClr val="55657A"/>
-                </a:solidFill>
+                  <a:srgbClr val="888888"/>
+                </a:solidFill>
+                <a:latin typeface="Meiryo UI"/>
               </a:rPr>
               <a:t>3.2</a:t>
             </a:r>
@@ -3545,8 +3550,8 @@
         </p:nvSpPr>
         <p:spPr>
           <a:xfrm>
-            <a:off x="457200" y="246888"/>
-            <a:ext cx="9491472" cy="566928"/>
+            <a:off x="828446" y="252374"/>
+            <a:ext cx="8686800" cy="288036"/>
           </a:xfrm>
           <a:prstGeom prst="rect">
             <a:avLst/>
@@ -3560,10 +3565,11 @@
           <a:lstStyle/>
           <a:p>
             <a:r>
-              <a:rPr sz="2600" b="1" i="0">
+              <a:rPr sz="2100" b="1" i="0">
                 <a:solidFill>
                   <a:srgbClr val="1A1A1A"/>
                 </a:solidFill>
+                <a:latin typeface="Meiryo UI"/>
               </a:rPr>
               <a:t>施策ロードマップ</a:t>
             </a:r>
@@ -3578,14 +3584,14 @@
         </p:nvSpPr>
         <p:spPr>
           <a:xfrm>
-            <a:off x="0" y="758952"/>
-            <a:ext cx="12188952" cy="22860"/>
+            <a:off x="838504" y="630021"/>
+            <a:ext cx="10515600" cy="19050"/>
           </a:xfrm>
           <a:prstGeom prst="rect">
             <a:avLst/>
           </a:prstGeom>
           <a:solidFill>
-            <a:srgbClr val="000000"/>
+            <a:srgbClr val="1A1A1A"/>
           </a:solidFill>
           <a:ln>
             <a:noFill/>
@@ -3622,8 +3628,8 @@
         </p:nvSpPr>
         <p:spPr>
           <a:xfrm>
-            <a:off x="457200" y="923544"/>
-            <a:ext cx="11411712" cy="548640"/>
+            <a:off x="838504" y="640080"/>
+            <a:ext cx="10515600" cy="629107"/>
           </a:xfrm>
           <a:prstGeom prst="rect">
             <a:avLst/>
@@ -3637,10 +3643,11 @@
           <a:lstStyle/>
           <a:p>
             <a:r>
-              <a:rPr sz="1200" b="0" i="0">
+              <a:rPr sz="1800" b="0" i="0">
                 <a:solidFill>
                   <a:srgbClr val="1A1A1A"/>
                 </a:solidFill>
+                <a:latin typeface="Meiryo UI"/>
               </a:rPr>
               <a:t>四半期単位で施策を段階的に展開します。</a:t>
             </a:r>
@@ -3655,8 +3662,8 @@
         </p:nvSpPr>
         <p:spPr>
           <a:xfrm>
-            <a:off x="457200" y="1568704"/>
-            <a:ext cx="11411712" cy="12700"/>
+            <a:off x="838504" y="1330960"/>
+            <a:ext cx="10515600" cy="12700"/>
           </a:xfrm>
           <a:prstGeom prst="rect">
             <a:avLst/>
@@ -3699,8 +3706,8 @@
         </p:nvSpPr>
         <p:spPr>
           <a:xfrm>
-            <a:off x="457200" y="1670304"/>
-            <a:ext cx="11411712" cy="2279904"/>
+            <a:off x="838504" y="1432560"/>
+            <a:ext cx="10515600" cy="2339797"/>
           </a:xfrm>
           <a:prstGeom prst="rect">
             <a:avLst/>
@@ -3722,10 +3729,11 @@
               </a:spcAft>
             </a:pPr>
             <a:r>
-              <a:rPr sz="1300" b="0" i="0">
+              <a:rPr sz="1600" b="0" i="0">
                 <a:solidFill>
                   <a:srgbClr val="1A1A1A"/>
                 </a:solidFill>
+                <a:latin typeface="Meiryo UI"/>
               </a:rPr>
               <a:t>**Q1〜Q2フェーズ（基盤整備）**</a:t>
             </a:r>
@@ -3740,18 +3748,20 @@
               </a:spcAft>
             </a:pPr>
             <a:r>
-              <a:rPr sz="1200" b="0" i="0">
-                <a:solidFill>
-                  <a:srgbClr val="1B4FA8"/>
-                </a:solidFill>
-              </a:rPr>
-              <a:t>• </a:t>
-            </a:r>
-            <a:r>
-              <a:rPr sz="1300" b="0" i="0">
+              <a:rPr sz="1600" b="0" i="0">
+                <a:solidFill>
+                  <a:srgbClr val="0066CD"/>
+                </a:solidFill>
+                <a:latin typeface="Meiryo UI"/>
+              </a:rPr>
+              <a:t>● </a:t>
+            </a:r>
+            <a:r>
+              <a:rPr sz="1600" b="0" i="0">
                 <a:solidFill>
                   <a:srgbClr val="1A1A1A"/>
                 </a:solidFill>
+                <a:latin typeface="Meiryo UI"/>
               </a:rPr>
               <a:t>CRMデータ整備・統合</a:t>
             </a:r>
@@ -3766,18 +3776,20 @@
               </a:spcAft>
             </a:pPr>
             <a:r>
-              <a:rPr sz="1200" b="0" i="0">
-                <a:solidFill>
-                  <a:srgbClr val="1B4FA8"/>
-                </a:solidFill>
-              </a:rPr>
-              <a:t>• </a:t>
-            </a:r>
-            <a:r>
-              <a:rPr sz="1300" b="0" i="0">
+              <a:rPr sz="1600" b="0" i="0">
+                <a:solidFill>
+                  <a:srgbClr val="0066CD"/>
+                </a:solidFill>
+                <a:latin typeface="Meiryo UI"/>
+              </a:rPr>
+              <a:t>● </a:t>
+            </a:r>
+            <a:r>
+              <a:rPr sz="1600" b="0" i="0">
                 <a:solidFill>
                   <a:srgbClr val="1A1A1A"/>
                 </a:solidFill>
+                <a:latin typeface="Meiryo UI"/>
               </a:rPr>
               <a:t>SDRチーム採用・研修（目標5名）</a:t>
             </a:r>
@@ -3792,18 +3804,20 @@
               </a:spcAft>
             </a:pPr>
             <a:r>
-              <a:rPr sz="1000" b="0" i="0">
-                <a:solidFill>
-                  <a:srgbClr val="808080"/>
-                </a:solidFill>
+              <a:rPr sz="1400" b="0" i="0">
+                <a:solidFill>
+                  <a:srgbClr val="888888"/>
+                </a:solidFill>
+                <a:latin typeface="Meiryo UI"/>
               </a:rPr>
               <a:t>      – </a:t>
             </a:r>
             <a:r>
-              <a:rPr sz="1100" b="0" i="0">
+              <a:rPr sz="1400" b="0" i="0">
                 <a:solidFill>
                   <a:srgbClr val="1A1A1A"/>
                 </a:solidFill>
+                <a:latin typeface="Meiryo UI"/>
               </a:rPr>
               <a:t>採用完了: 3名</a:t>
             </a:r>
@@ -3818,18 +3832,20 @@
               </a:spcAft>
             </a:pPr>
             <a:r>
-              <a:rPr sz="1000" b="0" i="0">
-                <a:solidFill>
-                  <a:srgbClr val="808080"/>
-                </a:solidFill>
+              <a:rPr sz="1400" b="0" i="0">
+                <a:solidFill>
+                  <a:srgbClr val="888888"/>
+                </a:solidFill>
+                <a:latin typeface="Meiryo UI"/>
               </a:rPr>
               <a:t>      – </a:t>
             </a:r>
             <a:r>
-              <a:rPr sz="1100" b="0" i="0">
+              <a:rPr sz="1400" b="0" i="0">
                 <a:solidFill>
                   <a:srgbClr val="1A1A1A"/>
                 </a:solidFill>
+                <a:latin typeface="Meiryo UI"/>
               </a:rPr>
               <a:t>研修中: 2名</a:t>
             </a:r>
@@ -3844,8 +3860,8 @@
         </p:nvSpPr>
         <p:spPr>
           <a:xfrm>
-            <a:off x="457200" y="4001008"/>
-            <a:ext cx="11411712" cy="12700"/>
+            <a:off x="838504" y="3823157"/>
+            <a:ext cx="10515600" cy="12700"/>
           </a:xfrm>
           <a:prstGeom prst="rect">
             <a:avLst/>
@@ -3888,8 +3904,8 @@
         </p:nvSpPr>
         <p:spPr>
           <a:xfrm>
-            <a:off x="457200" y="4102608"/>
-            <a:ext cx="11411712" cy="2279904"/>
+            <a:off x="838504" y="3924757"/>
+            <a:ext cx="10515600" cy="2339797"/>
           </a:xfrm>
           <a:prstGeom prst="rect">
             <a:avLst/>
@@ -3911,10 +3927,11 @@
               </a:spcAft>
             </a:pPr>
             <a:r>
-              <a:rPr sz="1300" b="0" i="0">
+              <a:rPr sz="1600" b="0" i="0">
                 <a:solidFill>
                   <a:srgbClr val="1A1A1A"/>
                 </a:solidFill>
+                <a:latin typeface="Meiryo UI"/>
               </a:rPr>
               <a:t>**Q3〜Q4フェーズ（拡大展開）**</a:t>
             </a:r>
@@ -3929,18 +3946,20 @@
               </a:spcAft>
             </a:pPr>
             <a:r>
-              <a:rPr sz="1200" b="0" i="0">
-                <a:solidFill>
-                  <a:srgbClr val="1B4FA8"/>
-                </a:solidFill>
-              </a:rPr>
-              <a:t>• </a:t>
-            </a:r>
-            <a:r>
-              <a:rPr sz="1300" b="0" i="0">
+              <a:rPr sz="1600" b="0" i="0">
+                <a:solidFill>
+                  <a:srgbClr val="0066CD"/>
+                </a:solidFill>
+                <a:latin typeface="Meiryo UI"/>
+              </a:rPr>
+              <a:t>● </a:t>
+            </a:r>
+            <a:r>
+              <a:rPr sz="1600" b="0" i="0">
                 <a:solidFill>
                   <a:srgbClr val="1A1A1A"/>
                 </a:solidFill>
+                <a:latin typeface="Meiryo UI"/>
               </a:rPr>
               <a:t>パートナーチャネル本格稼働</a:t>
             </a:r>
@@ -3955,18 +3974,20 @@
               </a:spcAft>
             </a:pPr>
             <a:r>
-              <a:rPr sz="1200" b="0" i="0">
-                <a:solidFill>
-                  <a:srgbClr val="1B4FA8"/>
-                </a:solidFill>
-              </a:rPr>
-              <a:t>• </a:t>
-            </a:r>
-            <a:r>
-              <a:rPr sz="1300" b="0" i="0">
+              <a:rPr sz="1600" b="0" i="0">
+                <a:solidFill>
+                  <a:srgbClr val="0066CD"/>
+                </a:solidFill>
+                <a:latin typeface="Meiryo UI"/>
+              </a:rPr>
+              <a:t>● </a:t>
+            </a:r>
+            <a:r>
+              <a:rPr sz="1600" b="0" i="0">
                 <a:solidFill>
                   <a:srgbClr val="1A1A1A"/>
                 </a:solidFill>
+                <a:latin typeface="Meiryo UI"/>
               </a:rPr>
               <a:t>自動化ツール導入（HubSpot連携）</a:t>
             </a:r>
@@ -3981,18 +4002,20 @@
               </a:spcAft>
             </a:pPr>
             <a:r>
-              <a:rPr sz="1000" b="0" i="0">
-                <a:solidFill>
-                  <a:srgbClr val="808080"/>
-                </a:solidFill>
+              <a:rPr sz="1400" b="0" i="0">
+                <a:solidFill>
+                  <a:srgbClr val="888888"/>
+                </a:solidFill>
+                <a:latin typeface="Meiryo UI"/>
               </a:rPr>
               <a:t>      – </a:t>
             </a:r>
             <a:r>
-              <a:rPr sz="1100" b="0" i="0">
+              <a:rPr sz="1400" b="0" i="0">
                 <a:solidFill>
                   <a:srgbClr val="1A1A1A"/>
                 </a:solidFill>
+                <a:latin typeface="Meiryo UI"/>
               </a:rPr>
               <a:t>自動化対象タスク: 約40%</a:t>
             </a:r>
@@ -4007,18 +4030,20 @@
               </a:spcAft>
             </a:pPr>
             <a:r>
-              <a:rPr sz="1000" b="0" i="0">
-                <a:solidFill>
-                  <a:srgbClr val="808080"/>
-                </a:solidFill>
+              <a:rPr sz="1400" b="0" i="0">
+                <a:solidFill>
+                  <a:srgbClr val="888888"/>
+                </a:solidFill>
+                <a:latin typeface="Meiryo UI"/>
               </a:rPr>
               <a:t>      – </a:t>
             </a:r>
             <a:r>
-              <a:rPr sz="1100" b="0" i="0">
+              <a:rPr sz="1400" b="0" i="0">
                 <a:solidFill>
                   <a:srgbClr val="1A1A1A"/>
                 </a:solidFill>
+                <a:latin typeface="Meiryo UI"/>
               </a:rPr>
               <a:t>工数削減見込み: 月間200時間</a:t>
             </a:r>
@@ -4041,8 +4066,8 @@
         </p:blipFill>
         <p:spPr>
           <a:xfrm>
-            <a:off x="10040112" y="73152"/>
-            <a:ext cx="2011680" cy="625706"/>
+            <a:off x="9338767" y="83210"/>
+            <a:ext cx="2016252" cy="468172"/>
           </a:xfrm>
           <a:prstGeom prst="rect">
             <a:avLst/>
@@ -4057,14 +4082,14 @@
         </p:nvSpPr>
         <p:spPr>
           <a:xfrm>
-            <a:off x="0" y="6473952"/>
-            <a:ext cx="12188952" cy="15240"/>
+            <a:off x="838504" y="6355994"/>
+            <a:ext cx="10515600" cy="19050"/>
           </a:xfrm>
           <a:prstGeom prst="rect">
             <a:avLst/>
           </a:prstGeom>
           <a:solidFill>
-            <a:srgbClr val="000000"/>
+            <a:srgbClr val="1A1A1A"/>
           </a:solidFill>
           <a:ln>
             <a:noFill/>
@@ -4101,8 +4126,8 @@
         </p:nvSpPr>
         <p:spPr>
           <a:xfrm>
-            <a:off x="457200" y="6512052"/>
-            <a:ext cx="7315200" cy="320040"/>
+            <a:off x="838504" y="6400800"/>
+            <a:ext cx="6400800" cy="228600"/>
           </a:xfrm>
           <a:prstGeom prst="rect">
             <a:avLst/>
@@ -4116,12 +4141,13 @@
           <a:lstStyle/>
           <a:p>
             <a:r>
-              <a:rPr sz="800" b="0" i="0">
-                <a:solidFill>
-                  <a:srgbClr val="808080"/>
-                </a:solidFill>
-              </a:rPr>
-              <a:t>Confidential All Rights Reserved SALESCORE Inc.</a:t>
+              <a:rPr sz="900" b="0" i="0">
+                <a:solidFill>
+                  <a:srgbClr val="888888"/>
+                </a:solidFill>
+                <a:latin typeface="Meiryo UI"/>
+              </a:rPr>
+              <a:t>Confidential All Rights Reserved SALESCORE Co., Ltd.</a:t>
             </a:r>
           </a:p>
         </p:txBody>
@@ -4134,8 +4160,8 @@
         </p:nvSpPr>
         <p:spPr>
           <a:xfrm>
-            <a:off x="11640312" y="6512052"/>
-            <a:ext cx="411480" cy="320040"/>
+            <a:off x="10515600" y="6400800"/>
+            <a:ext cx="1371600" cy="228600"/>
           </a:xfrm>
           <a:prstGeom prst="rect">
             <a:avLst/>
@@ -4150,10 +4176,11 @@
           <a:p>
             <a:pPr algn="r"/>
             <a:r>
-              <a:rPr sz="900" b="0" i="0">
-                <a:solidFill>
-                  <a:srgbClr val="808080"/>
-                </a:solidFill>
+              <a:rPr sz="1200" b="0" i="0">
+                <a:solidFill>
+                  <a:srgbClr val="888888"/>
+                </a:solidFill>
+                <a:latin typeface="Meiryo UI"/>
               </a:rPr>
               <a:t>10</a:t>
             </a:r>
@@ -4230,8 +4257,8 @@
         </p:nvSpPr>
         <p:spPr>
           <a:xfrm>
-            <a:off x="457200" y="64008"/>
-            <a:ext cx="9491472" cy="219456"/>
+            <a:off x="828446" y="64008"/>
+            <a:ext cx="8686800" cy="182880"/>
           </a:xfrm>
           <a:prstGeom prst="rect">
             <a:avLst/>
@@ -4247,8 +4274,9 @@
             <a:r>
               <a:rPr sz="900" b="1" i="0">
                 <a:solidFill>
-                  <a:srgbClr val="55657A"/>
-                </a:solidFill>
+                  <a:srgbClr val="888888"/>
+                </a:solidFill>
+                <a:latin typeface="Meiryo UI"/>
               </a:rPr>
               <a:t>3.3</a:t>
             </a:r>
@@ -4263,8 +4291,8 @@
         </p:nvSpPr>
         <p:spPr>
           <a:xfrm>
-            <a:off x="457200" y="246888"/>
-            <a:ext cx="9491472" cy="566928"/>
+            <a:off x="828446" y="252374"/>
+            <a:ext cx="8686800" cy="288036"/>
           </a:xfrm>
           <a:prstGeom prst="rect">
             <a:avLst/>
@@ -4278,10 +4306,11 @@
           <a:lstStyle/>
           <a:p>
             <a:r>
-              <a:rPr sz="2600" b="1" i="0">
+              <a:rPr sz="2100" b="1" i="0">
                 <a:solidFill>
                   <a:srgbClr val="1A1A1A"/>
                 </a:solidFill>
+                <a:latin typeface="Meiryo UI"/>
               </a:rPr>
               <a:t>チーム体制と役割分担</a:t>
             </a:r>
@@ -4296,14 +4325,14 @@
         </p:nvSpPr>
         <p:spPr>
           <a:xfrm>
-            <a:off x="0" y="758952"/>
-            <a:ext cx="12188952" cy="22860"/>
+            <a:off x="838504" y="630021"/>
+            <a:ext cx="10515600" cy="19050"/>
           </a:xfrm>
           <a:prstGeom prst="rect">
             <a:avLst/>
           </a:prstGeom>
           <a:solidFill>
-            <a:srgbClr val="000000"/>
+            <a:srgbClr val="1A1A1A"/>
           </a:solidFill>
           <a:ln>
             <a:noFill/>
@@ -4340,8 +4369,8 @@
         </p:nvSpPr>
         <p:spPr>
           <a:xfrm>
-            <a:off x="457200" y="923544"/>
-            <a:ext cx="11411712" cy="548640"/>
+            <a:off x="838504" y="640080"/>
+            <a:ext cx="10515600" cy="629107"/>
           </a:xfrm>
           <a:prstGeom prst="rect">
             <a:avLst/>
@@ -4355,10 +4384,11 @@
           <a:lstStyle/>
           <a:p>
             <a:r>
-              <a:rPr sz="1200" b="0" i="0">
+              <a:rPr sz="1800" b="0" i="0">
                 <a:solidFill>
                   <a:srgbClr val="1A1A1A"/>
                 </a:solidFill>
+                <a:latin typeface="Meiryo UI"/>
               </a:rPr>
               <a:t>各機能を担うチームの責任範囲を明確化します。</a:t>
             </a:r>
@@ -4373,8 +4403,8 @@
         </p:nvSpPr>
         <p:spPr>
           <a:xfrm>
-            <a:off x="457200" y="1517904"/>
-            <a:ext cx="5545836" cy="320040"/>
+            <a:off x="838504" y="1280160"/>
+            <a:ext cx="5097780" cy="320040"/>
           </a:xfrm>
           <a:prstGeom prst="rect">
             <a:avLst/>
@@ -4388,10 +4418,11 @@
           <a:lstStyle/>
           <a:p>
             <a:r>
-              <a:rPr sz="1300" b="1" i="0">
+              <a:rPr sz="1400" b="1" i="0">
                 <a:solidFill>
                   <a:srgbClr val="1D3461"/>
                 </a:solidFill>
+                <a:latin typeface="Meiryo UI"/>
               </a:rPr>
               <a:t>マーケティング</a:t>
             </a:r>
@@ -4406,8 +4437,8 @@
         </p:nvSpPr>
         <p:spPr>
           <a:xfrm>
-            <a:off x="6323076" y="1517904"/>
-            <a:ext cx="5545836" cy="320040"/>
+            <a:off x="6256324" y="1280160"/>
+            <a:ext cx="5097780" cy="320040"/>
           </a:xfrm>
           <a:prstGeom prst="rect">
             <a:avLst/>
@@ -4421,10 +4452,11 @@
           <a:lstStyle/>
           <a:p>
             <a:r>
-              <a:rPr sz="1300" b="1" i="0">
+              <a:rPr sz="1400" b="1" i="0">
                 <a:solidFill>
                   <a:srgbClr val="1D3461"/>
                 </a:solidFill>
+                <a:latin typeface="Meiryo UI"/>
               </a:rPr>
               <a:t>セールス &amp; CS</a:t>
             </a:r>
@@ -4439,8 +4471,8 @@
         </p:nvSpPr>
         <p:spPr>
           <a:xfrm>
-            <a:off x="6156706" y="1517904"/>
-            <a:ext cx="12700" cy="4864608"/>
+            <a:off x="6089954" y="1280160"/>
+            <a:ext cx="12700" cy="4984394"/>
           </a:xfrm>
           <a:prstGeom prst="rect">
             <a:avLst/>
@@ -4483,8 +4515,8 @@
         </p:nvSpPr>
         <p:spPr>
           <a:xfrm>
-            <a:off x="457200" y="1865376"/>
-            <a:ext cx="5545836" cy="4517136"/>
+            <a:off x="838504" y="1627632"/>
+            <a:ext cx="5097780" cy="4636922"/>
           </a:xfrm>
           <a:prstGeom prst="rect">
             <a:avLst/>
@@ -4506,18 +4538,20 @@
               </a:spcAft>
             </a:pPr>
             <a:r>
-              <a:rPr sz="1300" b="1" i="0">
-                <a:solidFill>
-                  <a:srgbClr val="1B4FA8"/>
-                </a:solidFill>
+              <a:rPr sz="1600" b="1" i="0">
+                <a:solidFill>
+                  <a:srgbClr val="0066CD"/>
+                </a:solidFill>
+                <a:latin typeface="Meiryo UI"/>
               </a:rPr>
               <a:t>1. </a:t>
             </a:r>
             <a:r>
-              <a:rPr sz="1300" b="0" i="0">
+              <a:rPr sz="1600" b="0" i="0">
                 <a:solidFill>
                   <a:srgbClr val="1A1A1A"/>
                 </a:solidFill>
+                <a:latin typeface="Meiryo UI"/>
               </a:rPr>
               <a:t>コンテンツ戦略立案</a:t>
             </a:r>
@@ -4532,18 +4566,20 @@
               </a:spcAft>
             </a:pPr>
             <a:r>
-              <a:rPr sz="1300" b="1" i="0">
-                <a:solidFill>
-                  <a:srgbClr val="1B4FA8"/>
-                </a:solidFill>
+              <a:rPr sz="1600" b="1" i="0">
+                <a:solidFill>
+                  <a:srgbClr val="0066CD"/>
+                </a:solidFill>
+                <a:latin typeface="Meiryo UI"/>
               </a:rPr>
               <a:t>2. </a:t>
             </a:r>
             <a:r>
-              <a:rPr sz="1300" b="0" i="0">
+              <a:rPr sz="1600" b="0" i="0">
                 <a:solidFill>
                   <a:srgbClr val="1A1A1A"/>
                 </a:solidFill>
+                <a:latin typeface="Meiryo UI"/>
               </a:rPr>
               <a:t>リード獲得キャンペーン運営</a:t>
             </a:r>
@@ -4558,18 +4594,20 @@
               </a:spcAft>
             </a:pPr>
             <a:r>
-              <a:rPr sz="1300" b="1" i="0">
-                <a:solidFill>
-                  <a:srgbClr val="1B4FA8"/>
-                </a:solidFill>
+              <a:rPr sz="1600" b="1" i="0">
+                <a:solidFill>
+                  <a:srgbClr val="0066CD"/>
+                </a:solidFill>
+                <a:latin typeface="Meiryo UI"/>
               </a:rPr>
               <a:t>3. </a:t>
             </a:r>
             <a:r>
-              <a:rPr sz="1300" b="0" i="0">
+              <a:rPr sz="1600" b="0" i="0">
                 <a:solidFill>
                   <a:srgbClr val="1A1A1A"/>
                 </a:solidFill>
+                <a:latin typeface="Meiryo UI"/>
               </a:rPr>
               <a:t>ブランド認知度向上施策</a:t>
             </a:r>
@@ -4584,18 +4622,20 @@
               </a:spcAft>
             </a:pPr>
             <a:r>
-              <a:rPr sz="1300" b="1" i="0">
-                <a:solidFill>
-                  <a:srgbClr val="1B4FA8"/>
-                </a:solidFill>
+              <a:rPr sz="1600" b="1" i="0">
+                <a:solidFill>
+                  <a:srgbClr val="0066CD"/>
+                </a:solidFill>
+                <a:latin typeface="Meiryo UI"/>
               </a:rPr>
               <a:t>4. </a:t>
             </a:r>
             <a:r>
-              <a:rPr sz="1300" b="0" i="0">
+              <a:rPr sz="1600" b="0" i="0">
                 <a:solidFill>
                   <a:srgbClr val="1A1A1A"/>
                 </a:solidFill>
+                <a:latin typeface="Meiryo UI"/>
               </a:rPr>
               <a:t>SEO・SEM最適化</a:t>
             </a:r>
@@ -4610,8 +4650,8 @@
         </p:nvSpPr>
         <p:spPr>
           <a:xfrm>
-            <a:off x="6323076" y="1865376"/>
-            <a:ext cx="5545836" cy="4517136"/>
+            <a:off x="6256324" y="1627632"/>
+            <a:ext cx="5097780" cy="4636922"/>
           </a:xfrm>
           <a:prstGeom prst="rect">
             <a:avLst/>
@@ -4633,18 +4673,20 @@
               </a:spcAft>
             </a:pPr>
             <a:r>
-              <a:rPr sz="1300" b="1" i="0">
-                <a:solidFill>
-                  <a:srgbClr val="1B4FA8"/>
-                </a:solidFill>
+              <a:rPr sz="1600" b="1" i="0">
+                <a:solidFill>
+                  <a:srgbClr val="0066CD"/>
+                </a:solidFill>
+                <a:latin typeface="Meiryo UI"/>
               </a:rPr>
               <a:t>1. </a:t>
             </a:r>
             <a:r>
-              <a:rPr sz="1300" b="0" i="0">
+              <a:rPr sz="1600" b="0" i="0">
                 <a:solidFill>
                   <a:srgbClr val="1A1A1A"/>
                 </a:solidFill>
+                <a:latin typeface="Meiryo UI"/>
               </a:rPr>
               <a:t>インバウンドリード対応</a:t>
             </a:r>
@@ -4659,18 +4701,20 @@
               </a:spcAft>
             </a:pPr>
             <a:r>
-              <a:rPr sz="1300" b="1" i="0">
-                <a:solidFill>
-                  <a:srgbClr val="1B4FA8"/>
-                </a:solidFill>
+              <a:rPr sz="1600" b="1" i="0">
+                <a:solidFill>
+                  <a:srgbClr val="0066CD"/>
+                </a:solidFill>
+                <a:latin typeface="Meiryo UI"/>
               </a:rPr>
               <a:t>2. </a:t>
             </a:r>
             <a:r>
-              <a:rPr sz="1300" b="0" i="0">
+              <a:rPr sz="1600" b="0" i="0">
                 <a:solidFill>
                   <a:srgbClr val="1A1A1A"/>
                 </a:solidFill>
+                <a:latin typeface="Meiryo UI"/>
               </a:rPr>
               <a:t>エンタープライズ開拓</a:t>
             </a:r>
@@ -4685,18 +4729,20 @@
               </a:spcAft>
             </a:pPr>
             <a:r>
-              <a:rPr sz="1300" b="1" i="0">
-                <a:solidFill>
-                  <a:srgbClr val="1B4FA8"/>
-                </a:solidFill>
+              <a:rPr sz="1600" b="1" i="0">
+                <a:solidFill>
+                  <a:srgbClr val="0066CD"/>
+                </a:solidFill>
+                <a:latin typeface="Meiryo UI"/>
               </a:rPr>
               <a:t>3. </a:t>
             </a:r>
             <a:r>
-              <a:rPr sz="1300" b="0" i="0">
+              <a:rPr sz="1600" b="0" i="0">
                 <a:solidFill>
                   <a:srgbClr val="1A1A1A"/>
                 </a:solidFill>
+                <a:latin typeface="Meiryo UI"/>
               </a:rPr>
               <a:t>オンボーディング設計</a:t>
             </a:r>
@@ -4711,18 +4757,20 @@
               </a:spcAft>
             </a:pPr>
             <a:r>
-              <a:rPr sz="1300" b="1" i="0">
-                <a:solidFill>
-                  <a:srgbClr val="1B4FA8"/>
-                </a:solidFill>
+              <a:rPr sz="1600" b="1" i="0">
+                <a:solidFill>
+                  <a:srgbClr val="0066CD"/>
+                </a:solidFill>
+                <a:latin typeface="Meiryo UI"/>
               </a:rPr>
               <a:t>4. </a:t>
             </a:r>
             <a:r>
-              <a:rPr sz="1300" b="0" i="0">
+              <a:rPr sz="1600" b="0" i="0">
                 <a:solidFill>
                   <a:srgbClr val="1A1A1A"/>
                 </a:solidFill>
+                <a:latin typeface="Meiryo UI"/>
               </a:rPr>
               <a:t>チャーン防止フォロー</a:t>
             </a:r>
@@ -4745,8 +4793,8 @@
         </p:blipFill>
         <p:spPr>
           <a:xfrm>
-            <a:off x="10040112" y="73152"/>
-            <a:ext cx="2011680" cy="625706"/>
+            <a:off x="9338767" y="83210"/>
+            <a:ext cx="2016252" cy="468172"/>
           </a:xfrm>
           <a:prstGeom prst="rect">
             <a:avLst/>
@@ -4761,14 +4809,14 @@
         </p:nvSpPr>
         <p:spPr>
           <a:xfrm>
-            <a:off x="0" y="6473952"/>
-            <a:ext cx="12188952" cy="15240"/>
+            <a:off x="838504" y="6355994"/>
+            <a:ext cx="10515600" cy="19050"/>
           </a:xfrm>
           <a:prstGeom prst="rect">
             <a:avLst/>
           </a:prstGeom>
           <a:solidFill>
-            <a:srgbClr val="000000"/>
+            <a:srgbClr val="1A1A1A"/>
           </a:solidFill>
           <a:ln>
             <a:noFill/>
@@ -4805,8 +4853,8 @@
         </p:nvSpPr>
         <p:spPr>
           <a:xfrm>
-            <a:off x="457200" y="6512052"/>
-            <a:ext cx="7315200" cy="320040"/>
+            <a:off x="838504" y="6400800"/>
+            <a:ext cx="6400800" cy="228600"/>
           </a:xfrm>
           <a:prstGeom prst="rect">
             <a:avLst/>
@@ -4820,12 +4868,13 @@
           <a:lstStyle/>
           <a:p>
             <a:r>
-              <a:rPr sz="800" b="0" i="0">
-                <a:solidFill>
-                  <a:srgbClr val="808080"/>
-                </a:solidFill>
-              </a:rPr>
-              <a:t>Confidential All Rights Reserved SALESCORE Inc.</a:t>
+              <a:rPr sz="900" b="0" i="0">
+                <a:solidFill>
+                  <a:srgbClr val="888888"/>
+                </a:solidFill>
+                <a:latin typeface="Meiryo UI"/>
+              </a:rPr>
+              <a:t>Confidential All Rights Reserved SALESCORE Co., Ltd.</a:t>
             </a:r>
           </a:p>
         </p:txBody>
@@ -4838,8 +4887,8 @@
         </p:nvSpPr>
         <p:spPr>
           <a:xfrm>
-            <a:off x="11640312" y="6512052"/>
-            <a:ext cx="411480" cy="320040"/>
+            <a:off x="10515600" y="6400800"/>
+            <a:ext cx="1371600" cy="228600"/>
           </a:xfrm>
           <a:prstGeom prst="rect">
             <a:avLst/>
@@ -4854,10 +4903,11 @@
           <a:p>
             <a:pPr algn="r"/>
             <a:r>
-              <a:rPr sz="900" b="0" i="0">
-                <a:solidFill>
-                  <a:srgbClr val="808080"/>
-                </a:solidFill>
+              <a:rPr sz="1200" b="0" i="0">
+                <a:solidFill>
+                  <a:srgbClr val="888888"/>
+                </a:solidFill>
+                <a:latin typeface="Meiryo UI"/>
               </a:rPr>
               <a:t>11</a:t>
             </a:r>
@@ -4953,6 +5003,7 @@
                 <a:solidFill>
                   <a:srgbClr val="FFFFFF"/>
                 </a:solidFill>
+                <a:latin typeface="Meiryo UI"/>
               </a:rPr>
               <a:t>4. 財務予測</a:t>
             </a:r>
@@ -5019,8 +5070,8 @@
         </p:blipFill>
         <p:spPr>
           <a:xfrm>
-            <a:off x="10040112" y="73152"/>
-            <a:ext cx="2011680" cy="625706"/>
+            <a:off x="9338767" y="83210"/>
+            <a:ext cx="2016252" cy="468172"/>
           </a:xfrm>
           <a:prstGeom prst="rect">
             <a:avLst/>
@@ -5035,14 +5086,14 @@
         </p:nvSpPr>
         <p:spPr>
           <a:xfrm>
-            <a:off x="0" y="6473952"/>
-            <a:ext cx="12188952" cy="15240"/>
+            <a:off x="838504" y="6355994"/>
+            <a:ext cx="10515600" cy="19050"/>
           </a:xfrm>
           <a:prstGeom prst="rect">
             <a:avLst/>
           </a:prstGeom>
           <a:solidFill>
-            <a:srgbClr val="000000"/>
+            <a:srgbClr val="1A1A1A"/>
           </a:solidFill>
           <a:ln>
             <a:noFill/>
@@ -5079,8 +5130,8 @@
         </p:nvSpPr>
         <p:spPr>
           <a:xfrm>
-            <a:off x="457200" y="6512052"/>
-            <a:ext cx="7315200" cy="320040"/>
+            <a:off x="838504" y="6400800"/>
+            <a:ext cx="6400800" cy="228600"/>
           </a:xfrm>
           <a:prstGeom prst="rect">
             <a:avLst/>
@@ -5094,12 +5145,13 @@
           <a:lstStyle/>
           <a:p>
             <a:r>
-              <a:rPr sz="800" b="0" i="0">
-                <a:solidFill>
-                  <a:srgbClr val="808080"/>
-                </a:solidFill>
-              </a:rPr>
-              <a:t>Confidential All Rights Reserved SALESCORE Inc.</a:t>
+              <a:rPr sz="900" b="0" i="0">
+                <a:solidFill>
+                  <a:srgbClr val="888888"/>
+                </a:solidFill>
+                <a:latin typeface="Meiryo UI"/>
+              </a:rPr>
+              <a:t>Confidential All Rights Reserved SALESCORE Co., Ltd.</a:t>
             </a:r>
           </a:p>
         </p:txBody>
@@ -5112,8 +5164,8 @@
         </p:nvSpPr>
         <p:spPr>
           <a:xfrm>
-            <a:off x="11640312" y="6512052"/>
-            <a:ext cx="411480" cy="320040"/>
+            <a:off x="10515600" y="6400800"/>
+            <a:ext cx="1371600" cy="228600"/>
           </a:xfrm>
           <a:prstGeom prst="rect">
             <a:avLst/>
@@ -5128,10 +5180,11 @@
           <a:p>
             <a:pPr algn="r"/>
             <a:r>
-              <a:rPr sz="900" b="0" i="0">
-                <a:solidFill>
-                  <a:srgbClr val="808080"/>
-                </a:solidFill>
+              <a:rPr sz="1200" b="0" i="0">
+                <a:solidFill>
+                  <a:srgbClr val="888888"/>
+                </a:solidFill>
+                <a:latin typeface="Meiryo UI"/>
               </a:rPr>
               <a:t>12</a:t>
             </a:r>
@@ -5208,8 +5261,8 @@
         </p:nvSpPr>
         <p:spPr>
           <a:xfrm>
-            <a:off x="457200" y="64008"/>
-            <a:ext cx="9491472" cy="219456"/>
+            <a:off x="828446" y="64008"/>
+            <a:ext cx="8686800" cy="182880"/>
           </a:xfrm>
           <a:prstGeom prst="rect">
             <a:avLst/>
@@ -5225,8 +5278,9 @@
             <a:r>
               <a:rPr sz="900" b="1" i="0">
                 <a:solidFill>
-                  <a:srgbClr val="55657A"/>
-                </a:solidFill>
+                  <a:srgbClr val="888888"/>
+                </a:solidFill>
+                <a:latin typeface="Meiryo UI"/>
               </a:rPr>
               <a:t>4.1</a:t>
             </a:r>
@@ -5241,8 +5295,8 @@
         </p:nvSpPr>
         <p:spPr>
           <a:xfrm>
-            <a:off x="457200" y="246888"/>
-            <a:ext cx="9491472" cy="566928"/>
+            <a:off x="828446" y="252374"/>
+            <a:ext cx="8686800" cy="288036"/>
           </a:xfrm>
           <a:prstGeom prst="rect">
             <a:avLst/>
@@ -5256,10 +5310,11 @@
           <a:lstStyle/>
           <a:p>
             <a:r>
-              <a:rPr sz="2600" b="1" i="0">
+              <a:rPr sz="2100" b="1" i="0">
                 <a:solidFill>
                   <a:srgbClr val="1A1A1A"/>
                 </a:solidFill>
+                <a:latin typeface="Meiryo UI"/>
               </a:rPr>
               <a:t>年間収益予測</a:t>
             </a:r>
@@ -5274,14 +5329,14 @@
         </p:nvSpPr>
         <p:spPr>
           <a:xfrm>
-            <a:off x="0" y="758952"/>
-            <a:ext cx="12188952" cy="22860"/>
+            <a:off x="838504" y="630021"/>
+            <a:ext cx="10515600" cy="19050"/>
           </a:xfrm>
           <a:prstGeom prst="rect">
             <a:avLst/>
           </a:prstGeom>
           <a:solidFill>
-            <a:srgbClr val="000000"/>
+            <a:srgbClr val="1A1A1A"/>
           </a:solidFill>
           <a:ln>
             <a:noFill/>
@@ -5318,8 +5373,8 @@
         </p:nvSpPr>
         <p:spPr>
           <a:xfrm>
-            <a:off x="457200" y="923544"/>
-            <a:ext cx="11411712" cy="548640"/>
+            <a:off x="838504" y="640080"/>
+            <a:ext cx="10515600" cy="629107"/>
           </a:xfrm>
           <a:prstGeom prst="rect">
             <a:avLst/>
@@ -5333,10 +5388,11 @@
           <a:lstStyle/>
           <a:p>
             <a:r>
-              <a:rPr sz="1200" b="0" i="0">
+              <a:rPr sz="1800" b="0" i="0">
                 <a:solidFill>
                   <a:srgbClr val="1A1A1A"/>
                 </a:solidFill>
+                <a:latin typeface="Meiryo UI"/>
               </a:rPr>
               <a:t>保守・基本・強気の3シナリオで収益レンジを提示します。</a:t>
             </a:r>
@@ -5352,8 +5408,8 @@
           <p:nvPr/>
         </p:nvGraphicFramePr>
         <p:xfrm>
-          <a:off x="457200" y="1517904"/>
-          <a:ext cx="11411712" cy="1325880"/>
+          <a:off x="838504" y="1280160"/>
+          <a:ext cx="10515600" cy="1325880"/>
         </p:xfrm>
         <a:graphic>
           <a:graphicData uri="http://schemas.openxmlformats.org/drawingml/2006/table">
@@ -5362,10 +5418,10 @@
                 <a:tableStyleId>{5C22544A-7EE6-4342-B048-85BDC9FD1C3A}</a:tableStyleId>
               </a:tblPr>
               <a:tblGrid>
-                <a:gridCol w="2852928"/>
-                <a:gridCol w="2852928"/>
-                <a:gridCol w="2852928"/>
-                <a:gridCol w="2852928"/>
+                <a:gridCol w="2628900"/>
+                <a:gridCol w="2628900"/>
+                <a:gridCol w="2628900"/>
+                <a:gridCol w="2628900"/>
               </a:tblGrid>
               <a:tr h="365760">
                 <a:tc>
@@ -5375,10 +5431,11 @@
                     <a:p>
                       <a:pPr algn="ctr"/>
                       <a:r>
-                        <a:rPr sz="1100" b="1" i="0">
+                        <a:rPr sz="1400" b="1" i="0">
                           <a:solidFill>
                             <a:srgbClr val="FFFFFF"/>
                           </a:solidFill>
+                          <a:latin typeface="Meiryo UI"/>
                         </a:rPr>
                         <a:t>シナリオ</a:t>
                       </a:r>
@@ -5397,10 +5454,11 @@
                     <a:p>
                       <a:pPr algn="ctr"/>
                       <a:r>
-                        <a:rPr sz="1100" b="1" i="0">
+                        <a:rPr sz="1400" b="1" i="0">
                           <a:solidFill>
                             <a:srgbClr val="FFFFFF"/>
                           </a:solidFill>
+                          <a:latin typeface="Meiryo UI"/>
                         </a:rPr>
                         <a:t>年間MRR（万円）</a:t>
                       </a:r>
@@ -5419,10 +5477,11 @@
                     <a:p>
                       <a:pPr algn="ctr"/>
                       <a:r>
-                        <a:rPr sz="1100" b="1" i="0">
+                        <a:rPr sz="1400" b="1" i="0">
                           <a:solidFill>
                             <a:srgbClr val="FFFFFF"/>
                           </a:solidFill>
+                          <a:latin typeface="Meiryo UI"/>
                         </a:rPr>
                         <a:t>成長率</a:t>
                       </a:r>
@@ -5441,10 +5500,11 @@
                     <a:p>
                       <a:pPr algn="ctr"/>
                       <a:r>
-                        <a:rPr sz="1100" b="1" i="0">
+                        <a:rPr sz="1400" b="1" i="0">
                           <a:solidFill>
                             <a:srgbClr val="FFFFFF"/>
                           </a:solidFill>
+                          <a:latin typeface="Meiryo UI"/>
                         </a:rPr>
                         <a:t>必要投資</a:t>
                       </a:r>
@@ -5465,10 +5525,11 @@
                     <a:p>
                       <a:pPr algn="l"/>
                       <a:r>
-                        <a:rPr sz="1100" b="0" i="0">
+                        <a:rPr sz="1400" b="0" i="0">
                           <a:solidFill>
                             <a:srgbClr val="1A1A1A"/>
                           </a:solidFill>
+                          <a:latin typeface="Meiryo UI"/>
                         </a:rPr>
                         <a:t>保守的</a:t>
                       </a:r>
@@ -5487,10 +5548,11 @@
                     <a:p>
                       <a:pPr algn="l"/>
                       <a:r>
-                        <a:rPr sz="1100" b="0" i="0">
+                        <a:rPr sz="1400" b="0" i="0">
                           <a:solidFill>
                             <a:srgbClr val="1A1A1A"/>
                           </a:solidFill>
+                          <a:latin typeface="Meiryo UI"/>
                         </a:rPr>
                         <a:t>28,000</a:t>
                       </a:r>
@@ -5509,10 +5571,11 @@
                     <a:p>
                       <a:pPr algn="l"/>
                       <a:r>
-                        <a:rPr sz="1100" b="0" i="0">
+                        <a:rPr sz="1400" b="0" i="0">
                           <a:solidFill>
                             <a:srgbClr val="1A1A1A"/>
                           </a:solidFill>
+                          <a:latin typeface="Meiryo UI"/>
                         </a:rPr>
                         <a:t>+85%</a:t>
                       </a:r>
@@ -5531,10 +5594,11 @@
                     <a:p>
                       <a:pPr algn="l"/>
                       <a:r>
-                        <a:rPr sz="1100" b="0" i="0">
+                        <a:rPr sz="1400" b="0" i="0">
                           <a:solidFill>
                             <a:srgbClr val="1A1A1A"/>
                           </a:solidFill>
+                          <a:latin typeface="Meiryo UI"/>
                         </a:rPr>
                         <a:t>2,400万円</a:t>
                       </a:r>
@@ -5555,10 +5619,11 @@
                     <a:p>
                       <a:pPr algn="l"/>
                       <a:r>
-                        <a:rPr sz="1100" b="0" i="0">
+                        <a:rPr sz="1400" b="0" i="0">
                           <a:solidFill>
                             <a:srgbClr val="1A1A1A"/>
                           </a:solidFill>
+                          <a:latin typeface="Meiryo UI"/>
                         </a:rPr>
                         <a:t>基本計画</a:t>
                       </a:r>
@@ -5577,10 +5642,11 @@
                     <a:p>
                       <a:pPr algn="l"/>
                       <a:r>
-                        <a:rPr sz="1100" b="0" i="0">
+                        <a:rPr sz="1400" b="0" i="0">
                           <a:solidFill>
                             <a:srgbClr val="1A1A1A"/>
                           </a:solidFill>
+                          <a:latin typeface="Meiryo UI"/>
                         </a:rPr>
                         <a:t>36,000</a:t>
                       </a:r>
@@ -5599,10 +5665,11 @@
                     <a:p>
                       <a:pPr algn="l"/>
                       <a:r>
-                        <a:rPr sz="1100" b="0" i="0">
+                        <a:rPr sz="1400" b="0" i="0">
                           <a:solidFill>
                             <a:srgbClr val="1A1A1A"/>
                           </a:solidFill>
+                          <a:latin typeface="Meiryo UI"/>
                         </a:rPr>
                         <a:t>+110%</a:t>
                       </a:r>
@@ -5621,10 +5688,11 @@
                     <a:p>
                       <a:pPr algn="l"/>
                       <a:r>
-                        <a:rPr sz="1100" b="0" i="0">
+                        <a:rPr sz="1400" b="0" i="0">
                           <a:solidFill>
                             <a:srgbClr val="1A1A1A"/>
                           </a:solidFill>
+                          <a:latin typeface="Meiryo UI"/>
                         </a:rPr>
                         <a:t>3,200万円</a:t>
                       </a:r>
@@ -5645,10 +5713,11 @@
                     <a:p>
                       <a:pPr algn="l"/>
                       <a:r>
-                        <a:rPr sz="1100" b="0" i="0">
+                        <a:rPr sz="1400" b="0" i="0">
                           <a:solidFill>
                             <a:srgbClr val="1A1A1A"/>
                           </a:solidFill>
+                          <a:latin typeface="Meiryo UI"/>
                         </a:rPr>
                         <a:t>強気</a:t>
                       </a:r>
@@ -5667,10 +5736,11 @@
                     <a:p>
                       <a:pPr algn="l"/>
                       <a:r>
-                        <a:rPr sz="1100" b="0" i="0">
+                        <a:rPr sz="1400" b="0" i="0">
                           <a:solidFill>
                             <a:srgbClr val="1A1A1A"/>
                           </a:solidFill>
+                          <a:latin typeface="Meiryo UI"/>
                         </a:rPr>
                         <a:t>48,000</a:t>
                       </a:r>
@@ -5689,10 +5759,11 @@
                     <a:p>
                       <a:pPr algn="l"/>
                       <a:r>
-                        <a:rPr sz="1100" b="0" i="0">
+                        <a:rPr sz="1400" b="0" i="0">
                           <a:solidFill>
                             <a:srgbClr val="1A1A1A"/>
                           </a:solidFill>
+                          <a:latin typeface="Meiryo UI"/>
                         </a:rPr>
                         <a:t>+145%</a:t>
                       </a:r>
@@ -5711,10 +5782,11 @@
                     <a:p>
                       <a:pPr algn="l"/>
                       <a:r>
-                        <a:rPr sz="1100" b="0" i="0">
+                        <a:rPr sz="1400" b="0" i="0">
                           <a:solidFill>
                             <a:srgbClr val="1A1A1A"/>
                           </a:solidFill>
+                          <a:latin typeface="Meiryo UI"/>
                         </a:rPr>
                         <a:t>4,500万円</a:t>
                       </a:r>
@@ -5747,8 +5819,8 @@
         </p:blipFill>
         <p:spPr>
           <a:xfrm>
-            <a:off x="10040112" y="73152"/>
-            <a:ext cx="2011680" cy="625706"/>
+            <a:off x="9338767" y="83210"/>
+            <a:ext cx="2016252" cy="468172"/>
           </a:xfrm>
           <a:prstGeom prst="rect">
             <a:avLst/>
@@ -5763,14 +5835,14 @@
         </p:nvSpPr>
         <p:spPr>
           <a:xfrm>
-            <a:off x="0" y="6473952"/>
-            <a:ext cx="12188952" cy="15240"/>
+            <a:off x="838504" y="6355994"/>
+            <a:ext cx="10515600" cy="19050"/>
           </a:xfrm>
           <a:prstGeom prst="rect">
             <a:avLst/>
           </a:prstGeom>
           <a:solidFill>
-            <a:srgbClr val="000000"/>
+            <a:srgbClr val="1A1A1A"/>
           </a:solidFill>
           <a:ln>
             <a:noFill/>
@@ -5807,8 +5879,8 @@
         </p:nvSpPr>
         <p:spPr>
           <a:xfrm>
-            <a:off x="457200" y="6512052"/>
-            <a:ext cx="7315200" cy="320040"/>
+            <a:off x="838504" y="6400800"/>
+            <a:ext cx="6400800" cy="228600"/>
           </a:xfrm>
           <a:prstGeom prst="rect">
             <a:avLst/>
@@ -5822,12 +5894,13 @@
           <a:lstStyle/>
           <a:p>
             <a:r>
-              <a:rPr sz="800" b="0" i="0">
-                <a:solidFill>
-                  <a:srgbClr val="808080"/>
-                </a:solidFill>
-              </a:rPr>
-              <a:t>Confidential All Rights Reserved SALESCORE Inc.</a:t>
+              <a:rPr sz="900" b="0" i="0">
+                <a:solidFill>
+                  <a:srgbClr val="888888"/>
+                </a:solidFill>
+                <a:latin typeface="Meiryo UI"/>
+              </a:rPr>
+              <a:t>Confidential All Rights Reserved SALESCORE Co., Ltd.</a:t>
             </a:r>
           </a:p>
         </p:txBody>
@@ -5840,8 +5913,8 @@
         </p:nvSpPr>
         <p:spPr>
           <a:xfrm>
-            <a:off x="11640312" y="6512052"/>
-            <a:ext cx="411480" cy="320040"/>
+            <a:off x="10515600" y="6400800"/>
+            <a:ext cx="1371600" cy="228600"/>
           </a:xfrm>
           <a:prstGeom prst="rect">
             <a:avLst/>
@@ -5856,10 +5929,11 @@
           <a:p>
             <a:pPr algn="r"/>
             <a:r>
-              <a:rPr sz="900" b="0" i="0">
-                <a:solidFill>
-                  <a:srgbClr val="808080"/>
-                </a:solidFill>
+              <a:rPr sz="1200" b="0" i="0">
+                <a:solidFill>
+                  <a:srgbClr val="888888"/>
+                </a:solidFill>
+                <a:latin typeface="Meiryo UI"/>
               </a:rPr>
               <a:t>13</a:t>
             </a:r>
@@ -5936,8 +6010,8 @@
         </p:nvSpPr>
         <p:spPr>
           <a:xfrm>
-            <a:off x="457200" y="64008"/>
-            <a:ext cx="9491472" cy="219456"/>
+            <a:off x="828446" y="64008"/>
+            <a:ext cx="8686800" cy="182880"/>
           </a:xfrm>
           <a:prstGeom prst="rect">
             <a:avLst/>
@@ -5953,8 +6027,9 @@
             <a:r>
               <a:rPr sz="900" b="1" i="0">
                 <a:solidFill>
-                  <a:srgbClr val="55657A"/>
-                </a:solidFill>
+                  <a:srgbClr val="888888"/>
+                </a:solidFill>
+                <a:latin typeface="Meiryo UI"/>
               </a:rPr>
               <a:t>4.2</a:t>
             </a:r>
@@ -5969,8 +6044,8 @@
         </p:nvSpPr>
         <p:spPr>
           <a:xfrm>
-            <a:off x="457200" y="246888"/>
-            <a:ext cx="9491472" cy="566928"/>
+            <a:off x="828446" y="252374"/>
+            <a:ext cx="8686800" cy="288036"/>
           </a:xfrm>
           <a:prstGeom prst="rect">
             <a:avLst/>
@@ -5984,10 +6059,11 @@
           <a:lstStyle/>
           <a:p>
             <a:r>
-              <a:rPr sz="2600" b="1" i="0">
+              <a:rPr sz="2100" b="1" i="0">
                 <a:solidFill>
                   <a:srgbClr val="1A1A1A"/>
                 </a:solidFill>
+                <a:latin typeface="Meiryo UI"/>
               </a:rPr>
               <a:t>投資対効果（ROI）</a:t>
             </a:r>
@@ -6002,14 +6078,14 @@
         </p:nvSpPr>
         <p:spPr>
           <a:xfrm>
-            <a:off x="0" y="758952"/>
-            <a:ext cx="12188952" cy="22860"/>
+            <a:off x="838504" y="630021"/>
+            <a:ext cx="10515600" cy="19050"/>
           </a:xfrm>
           <a:prstGeom prst="rect">
             <a:avLst/>
           </a:prstGeom>
           <a:solidFill>
-            <a:srgbClr val="000000"/>
+            <a:srgbClr val="1A1A1A"/>
           </a:solidFill>
           <a:ln>
             <a:noFill/>
@@ -6046,8 +6122,8 @@
         </p:nvSpPr>
         <p:spPr>
           <a:xfrm>
-            <a:off x="457200" y="923544"/>
-            <a:ext cx="11411712" cy="548640"/>
+            <a:off x="838504" y="640080"/>
+            <a:ext cx="10515600" cy="629107"/>
           </a:xfrm>
           <a:prstGeom prst="rect">
             <a:avLst/>
@@ -6061,10 +6137,11 @@
           <a:lstStyle/>
           <a:p>
             <a:r>
-              <a:rPr sz="1200" b="0" i="0">
+              <a:rPr sz="1800" b="0" i="0">
                 <a:solidFill>
                   <a:srgbClr val="1A1A1A"/>
                 </a:solidFill>
+                <a:latin typeface="Meiryo UI"/>
               </a:rPr>
               <a:t>施策ごとのROIを試算し、優先投資領域を特定します。</a:t>
             </a:r>
@@ -6079,8 +6156,8 @@
         </p:nvSpPr>
         <p:spPr>
           <a:xfrm>
-            <a:off x="457200" y="1517904"/>
-            <a:ext cx="11411712" cy="4864608"/>
+            <a:off x="838504" y="1280160"/>
+            <a:ext cx="10515600" cy="4984394"/>
           </a:xfrm>
           <a:prstGeom prst="rect">
             <a:avLst/>
@@ -6102,18 +6179,20 @@
               </a:spcAft>
             </a:pPr>
             <a:r>
-              <a:rPr sz="1200" b="0" i="0">
-                <a:solidFill>
-                  <a:srgbClr val="1B4FA8"/>
-                </a:solidFill>
-              </a:rPr>
-              <a:t>• </a:t>
-            </a:r>
-            <a:r>
-              <a:rPr sz="1300" b="0" i="0">
+              <a:rPr sz="1600" b="0" i="0">
+                <a:solidFill>
+                  <a:srgbClr val="0066CD"/>
+                </a:solidFill>
+                <a:latin typeface="Meiryo UI"/>
+              </a:rPr>
+              <a:t>● </a:t>
+            </a:r>
+            <a:r>
+              <a:rPr sz="1600" b="0" i="0">
                 <a:solidFill>
                   <a:srgbClr val="1A1A1A"/>
                 </a:solidFill>
+                <a:latin typeface="Meiryo UI"/>
               </a:rPr>
               <a:t>インバウンドマーケティング: ROI **320%**（12ヶ月回収）</a:t>
             </a:r>
@@ -6128,18 +6207,20 @@
               </a:spcAft>
             </a:pPr>
             <a:r>
-              <a:rPr sz="1000" b="0" i="0">
-                <a:solidFill>
-                  <a:srgbClr val="808080"/>
-                </a:solidFill>
+              <a:rPr sz="1400" b="0" i="0">
+                <a:solidFill>
+                  <a:srgbClr val="888888"/>
+                </a:solidFill>
+                <a:latin typeface="Meiryo UI"/>
               </a:rPr>
               <a:t>      – </a:t>
             </a:r>
             <a:r>
-              <a:rPr sz="1100" b="0" i="0">
+              <a:rPr sz="1400" b="0" i="0">
                 <a:solidFill>
                   <a:srgbClr val="1A1A1A"/>
                 </a:solidFill>
+                <a:latin typeface="Meiryo UI"/>
               </a:rPr>
               <a:t>コンテンツ制作費: 月200万円</a:t>
             </a:r>
@@ -6154,18 +6235,20 @@
               </a:spcAft>
             </a:pPr>
             <a:r>
-              <a:rPr sz="1000" b="0" i="0">
-                <a:solidFill>
-                  <a:srgbClr val="808080"/>
-                </a:solidFill>
+              <a:rPr sz="1400" b="0" i="0">
+                <a:solidFill>
+                  <a:srgbClr val="888888"/>
+                </a:solidFill>
+                <a:latin typeface="Meiryo UI"/>
               </a:rPr>
               <a:t>      – </a:t>
             </a:r>
             <a:r>
-              <a:rPr sz="1100" b="0" i="0">
+              <a:rPr sz="1400" b="0" i="0">
                 <a:solidFill>
                   <a:srgbClr val="1A1A1A"/>
                 </a:solidFill>
+                <a:latin typeface="Meiryo UI"/>
               </a:rPr>
               <a:t>見込みリード: 月150件</a:t>
             </a:r>
@@ -6180,18 +6263,20 @@
               </a:spcAft>
             </a:pPr>
             <a:r>
-              <a:rPr sz="1200" b="0" i="0">
-                <a:solidFill>
-                  <a:srgbClr val="1B4FA8"/>
-                </a:solidFill>
-              </a:rPr>
-              <a:t>• </a:t>
-            </a:r>
-            <a:r>
-              <a:rPr sz="1300" b="0" i="0">
+              <a:rPr sz="1600" b="0" i="0">
+                <a:solidFill>
+                  <a:srgbClr val="0066CD"/>
+                </a:solidFill>
+                <a:latin typeface="Meiryo UI"/>
+              </a:rPr>
+              <a:t>● </a:t>
+            </a:r>
+            <a:r>
+              <a:rPr sz="1600" b="0" i="0">
                 <a:solidFill>
                   <a:srgbClr val="1A1A1A"/>
                 </a:solidFill>
+                <a:latin typeface="Meiryo UI"/>
               </a:rPr>
               <a:t>SDR体制構築: ROI **180%**（18ヶ月回収）</a:t>
             </a:r>
@@ -6206,18 +6291,20 @@
               </a:spcAft>
             </a:pPr>
             <a:r>
-              <a:rPr sz="1000" b="0" i="0">
-                <a:solidFill>
-                  <a:srgbClr val="808080"/>
-                </a:solidFill>
+              <a:rPr sz="1400" b="0" i="0">
+                <a:solidFill>
+                  <a:srgbClr val="888888"/>
+                </a:solidFill>
+                <a:latin typeface="Meiryo UI"/>
               </a:rPr>
               <a:t>      – </a:t>
             </a:r>
             <a:r>
-              <a:rPr sz="1100" b="0" i="0">
+              <a:rPr sz="1400" b="0" i="0">
                 <a:solidFill>
                   <a:srgbClr val="1A1A1A"/>
                 </a:solidFill>
+                <a:latin typeface="Meiryo UI"/>
               </a:rPr>
               <a:t>採用・研修コスト: 1,200万円</a:t>
             </a:r>
@@ -6232,18 +6319,20 @@
               </a:spcAft>
             </a:pPr>
             <a:r>
-              <a:rPr sz="1000" b="0" i="0">
-                <a:solidFill>
-                  <a:srgbClr val="808080"/>
-                </a:solidFill>
+              <a:rPr sz="1400" b="0" i="0">
+                <a:solidFill>
+                  <a:srgbClr val="888888"/>
+                </a:solidFill>
+                <a:latin typeface="Meiryo UI"/>
               </a:rPr>
               <a:t>      – </a:t>
             </a:r>
             <a:r>
-              <a:rPr sz="1100" b="0" i="0">
+              <a:rPr sz="1400" b="0" i="0">
                 <a:solidFill>
                   <a:srgbClr val="1A1A1A"/>
                 </a:solidFill>
+                <a:latin typeface="Meiryo UI"/>
               </a:rPr>
               <a:t>期待新規契約: 年60件</a:t>
             </a:r>
@@ -6258,18 +6347,20 @@
               </a:spcAft>
             </a:pPr>
             <a:r>
-              <a:rPr sz="1200" b="0" i="0">
-                <a:solidFill>
-                  <a:srgbClr val="1B4FA8"/>
-                </a:solidFill>
-              </a:rPr>
-              <a:t>• </a:t>
-            </a:r>
-            <a:r>
-              <a:rPr sz="1300" b="0" i="0">
+              <a:rPr sz="1600" b="0" i="0">
+                <a:solidFill>
+                  <a:srgbClr val="0066CD"/>
+                </a:solidFill>
+                <a:latin typeface="Meiryo UI"/>
+              </a:rPr>
+              <a:t>● </a:t>
+            </a:r>
+            <a:r>
+              <a:rPr sz="1600" b="0" i="0">
                 <a:solidFill>
                   <a:srgbClr val="1A1A1A"/>
                 </a:solidFill>
+                <a:latin typeface="Meiryo UI"/>
               </a:rPr>
               <a:t>パートナーチャネル: ROI **510%**（6ヶ月回収）</a:t>
             </a:r>
@@ -6284,18 +6375,20 @@
               </a:spcAft>
             </a:pPr>
             <a:r>
-              <a:rPr sz="1000" b="0" i="0">
-                <a:solidFill>
-                  <a:srgbClr val="808080"/>
-                </a:solidFill>
+              <a:rPr sz="1400" b="0" i="0">
+                <a:solidFill>
+                  <a:srgbClr val="888888"/>
+                </a:solidFill>
+                <a:latin typeface="Meiryo UI"/>
               </a:rPr>
               <a:t>      – </a:t>
             </a:r>
             <a:r>
-              <a:rPr sz="1100" b="0" i="0">
+              <a:rPr sz="1400" b="0" i="0">
                 <a:solidFill>
                   <a:srgbClr val="1A1A1A"/>
                 </a:solidFill>
+                <a:latin typeface="Meiryo UI"/>
               </a:rPr>
               <a:t>初期投資: 300万円</a:t>
             </a:r>
@@ -6310,18 +6403,20 @@
               </a:spcAft>
             </a:pPr>
             <a:r>
-              <a:rPr sz="1000" b="0" i="0">
-                <a:solidFill>
-                  <a:srgbClr val="808080"/>
-                </a:solidFill>
+              <a:rPr sz="1400" b="0" i="0">
+                <a:solidFill>
+                  <a:srgbClr val="888888"/>
+                </a:solidFill>
+                <a:latin typeface="Meiryo UI"/>
               </a:rPr>
               <a:t>      – </a:t>
             </a:r>
             <a:r>
-              <a:rPr sz="1100" b="0" i="0">
+              <a:rPr sz="1400" b="0" i="0">
                 <a:solidFill>
                   <a:srgbClr val="1A1A1A"/>
                 </a:solidFill>
+                <a:latin typeface="Meiryo UI"/>
               </a:rPr>
               <a:t>期待紹介案件: 月20件</a:t>
             </a:r>
@@ -6344,8 +6439,8 @@
         </p:blipFill>
         <p:spPr>
           <a:xfrm>
-            <a:off x="10040112" y="73152"/>
-            <a:ext cx="2011680" cy="625706"/>
+            <a:off x="9338767" y="83210"/>
+            <a:ext cx="2016252" cy="468172"/>
           </a:xfrm>
           <a:prstGeom prst="rect">
             <a:avLst/>
@@ -6360,14 +6455,14 @@
         </p:nvSpPr>
         <p:spPr>
           <a:xfrm>
-            <a:off x="0" y="6473952"/>
-            <a:ext cx="12188952" cy="15240"/>
+            <a:off x="838504" y="6355994"/>
+            <a:ext cx="10515600" cy="19050"/>
           </a:xfrm>
           <a:prstGeom prst="rect">
             <a:avLst/>
           </a:prstGeom>
           <a:solidFill>
-            <a:srgbClr val="000000"/>
+            <a:srgbClr val="1A1A1A"/>
           </a:solidFill>
           <a:ln>
             <a:noFill/>
@@ -6404,8 +6499,8 @@
         </p:nvSpPr>
         <p:spPr>
           <a:xfrm>
-            <a:off x="457200" y="6512052"/>
-            <a:ext cx="7315200" cy="320040"/>
+            <a:off x="838504" y="6400800"/>
+            <a:ext cx="6400800" cy="228600"/>
           </a:xfrm>
           <a:prstGeom prst="rect">
             <a:avLst/>
@@ -6419,12 +6514,13 @@
           <a:lstStyle/>
           <a:p>
             <a:r>
-              <a:rPr sz="800" b="0" i="0">
-                <a:solidFill>
-                  <a:srgbClr val="808080"/>
-                </a:solidFill>
-              </a:rPr>
-              <a:t>Confidential All Rights Reserved SALESCORE Inc.</a:t>
+              <a:rPr sz="900" b="0" i="0">
+                <a:solidFill>
+                  <a:srgbClr val="888888"/>
+                </a:solidFill>
+                <a:latin typeface="Meiryo UI"/>
+              </a:rPr>
+              <a:t>Confidential All Rights Reserved SALESCORE Co., Ltd.</a:t>
             </a:r>
           </a:p>
         </p:txBody>
@@ -6437,8 +6533,8 @@
         </p:nvSpPr>
         <p:spPr>
           <a:xfrm>
-            <a:off x="11640312" y="6512052"/>
-            <a:ext cx="411480" cy="320040"/>
+            <a:off x="10515600" y="6400800"/>
+            <a:ext cx="1371600" cy="228600"/>
           </a:xfrm>
           <a:prstGeom prst="rect">
             <a:avLst/>
@@ -6453,10 +6549,11 @@
           <a:p>
             <a:pPr algn="r"/>
             <a:r>
-              <a:rPr sz="900" b="0" i="0">
-                <a:solidFill>
-                  <a:srgbClr val="808080"/>
-                </a:solidFill>
+              <a:rPr sz="1200" b="0" i="0">
+                <a:solidFill>
+                  <a:srgbClr val="888888"/>
+                </a:solidFill>
+                <a:latin typeface="Meiryo UI"/>
               </a:rPr>
               <a:t>14</a:t>
             </a:r>
@@ -6552,6 +6649,7 @@
                 <a:solidFill>
                   <a:srgbClr val="FFFFFF"/>
                 </a:solidFill>
+                <a:latin typeface="Meiryo UI"/>
               </a:rPr>
               <a:t>5. 次のステップ</a:t>
             </a:r>
@@ -6618,8 +6716,8 @@
         </p:blipFill>
         <p:spPr>
           <a:xfrm>
-            <a:off x="10040112" y="73152"/>
-            <a:ext cx="2011680" cy="625706"/>
+            <a:off x="9338767" y="83210"/>
+            <a:ext cx="2016252" cy="468172"/>
           </a:xfrm>
           <a:prstGeom prst="rect">
             <a:avLst/>
@@ -6634,14 +6732,14 @@
         </p:nvSpPr>
         <p:spPr>
           <a:xfrm>
-            <a:off x="0" y="6473952"/>
-            <a:ext cx="12188952" cy="15240"/>
+            <a:off x="838504" y="6355994"/>
+            <a:ext cx="10515600" cy="19050"/>
           </a:xfrm>
           <a:prstGeom prst="rect">
             <a:avLst/>
           </a:prstGeom>
           <a:solidFill>
-            <a:srgbClr val="000000"/>
+            <a:srgbClr val="1A1A1A"/>
           </a:solidFill>
           <a:ln>
             <a:noFill/>
@@ -6678,8 +6776,8 @@
         </p:nvSpPr>
         <p:spPr>
           <a:xfrm>
-            <a:off x="457200" y="6512052"/>
-            <a:ext cx="7315200" cy="320040"/>
+            <a:off x="838504" y="6400800"/>
+            <a:ext cx="6400800" cy="228600"/>
           </a:xfrm>
           <a:prstGeom prst="rect">
             <a:avLst/>
@@ -6693,12 +6791,13 @@
           <a:lstStyle/>
           <a:p>
             <a:r>
-              <a:rPr sz="800" b="0" i="0">
-                <a:solidFill>
-                  <a:srgbClr val="808080"/>
-                </a:solidFill>
-              </a:rPr>
-              <a:t>Confidential All Rights Reserved SALESCORE Inc.</a:t>
+              <a:rPr sz="900" b="0" i="0">
+                <a:solidFill>
+                  <a:srgbClr val="888888"/>
+                </a:solidFill>
+                <a:latin typeface="Meiryo UI"/>
+              </a:rPr>
+              <a:t>Confidential All Rights Reserved SALESCORE Co., Ltd.</a:t>
             </a:r>
           </a:p>
         </p:txBody>
@@ -6711,8 +6810,8 @@
         </p:nvSpPr>
         <p:spPr>
           <a:xfrm>
-            <a:off x="11640312" y="6512052"/>
-            <a:ext cx="411480" cy="320040"/>
+            <a:off x="10515600" y="6400800"/>
+            <a:ext cx="1371600" cy="228600"/>
           </a:xfrm>
           <a:prstGeom prst="rect">
             <a:avLst/>
@@ -6727,10 +6826,11 @@
           <a:p>
             <a:pPr algn="r"/>
             <a:r>
-              <a:rPr sz="900" b="0" i="0">
-                <a:solidFill>
-                  <a:srgbClr val="808080"/>
-                </a:solidFill>
+              <a:rPr sz="1200" b="0" i="0">
+                <a:solidFill>
+                  <a:srgbClr val="888888"/>
+                </a:solidFill>
+                <a:latin typeface="Meiryo UI"/>
               </a:rPr>
               <a:t>15</a:t>
             </a:r>
@@ -6807,8 +6907,8 @@
         </p:nvSpPr>
         <p:spPr>
           <a:xfrm>
-            <a:off x="457200" y="64008"/>
-            <a:ext cx="9491472" cy="219456"/>
+            <a:off x="828446" y="64008"/>
+            <a:ext cx="8686800" cy="182880"/>
           </a:xfrm>
           <a:prstGeom prst="rect">
             <a:avLst/>
@@ -6824,8 +6924,9 @@
             <a:r>
               <a:rPr sz="900" b="1" i="0">
                 <a:solidFill>
-                  <a:srgbClr val="55657A"/>
-                </a:solidFill>
+                  <a:srgbClr val="888888"/>
+                </a:solidFill>
+                <a:latin typeface="Meiryo UI"/>
               </a:rPr>
               <a:t>5.1</a:t>
             </a:r>
@@ -6840,8 +6941,8 @@
         </p:nvSpPr>
         <p:spPr>
           <a:xfrm>
-            <a:off x="457200" y="246888"/>
-            <a:ext cx="9491472" cy="566928"/>
+            <a:off x="828446" y="252374"/>
+            <a:ext cx="8686800" cy="288036"/>
           </a:xfrm>
           <a:prstGeom prst="rect">
             <a:avLst/>
@@ -6855,10 +6956,11 @@
           <a:lstStyle/>
           <a:p>
             <a:r>
-              <a:rPr sz="2600" b="1" i="0">
+              <a:rPr sz="2100" b="1" i="0">
                 <a:solidFill>
                   <a:srgbClr val="1A1A1A"/>
                 </a:solidFill>
+                <a:latin typeface="Meiryo UI"/>
               </a:rPr>
               <a:t>アクションアイテム</a:t>
             </a:r>
@@ -6873,14 +6975,14 @@
         </p:nvSpPr>
         <p:spPr>
           <a:xfrm>
-            <a:off x="0" y="758952"/>
-            <a:ext cx="12188952" cy="22860"/>
+            <a:off x="838504" y="630021"/>
+            <a:ext cx="10515600" cy="19050"/>
           </a:xfrm>
           <a:prstGeom prst="rect">
             <a:avLst/>
           </a:prstGeom>
           <a:solidFill>
-            <a:srgbClr val="000000"/>
+            <a:srgbClr val="1A1A1A"/>
           </a:solidFill>
           <a:ln>
             <a:noFill/>
@@ -6917,8 +7019,8 @@
         </p:nvSpPr>
         <p:spPr>
           <a:xfrm>
-            <a:off x="457200" y="923544"/>
-            <a:ext cx="11411712" cy="548640"/>
+            <a:off x="838504" y="640080"/>
+            <a:ext cx="10515600" cy="629107"/>
           </a:xfrm>
           <a:prstGeom prst="rect">
             <a:avLst/>
@@ -6932,10 +7034,11 @@
           <a:lstStyle/>
           <a:p>
             <a:r>
-              <a:rPr sz="1200" b="0" i="0">
+              <a:rPr sz="1800" b="0" i="0">
                 <a:solidFill>
                   <a:srgbClr val="1A1A1A"/>
                 </a:solidFill>
+                <a:latin typeface="Meiryo UI"/>
               </a:rPr>
               <a:t>各部門が優先的に取り組むべき事項を整理しました。</a:t>
             </a:r>
@@ -6950,8 +7053,8 @@
         </p:nvSpPr>
         <p:spPr>
           <a:xfrm>
-            <a:off x="457200" y="1517904"/>
-            <a:ext cx="11411712" cy="4864608"/>
+            <a:off x="838504" y="1280160"/>
+            <a:ext cx="10515600" cy="4984394"/>
           </a:xfrm>
           <a:prstGeom prst="rect">
             <a:avLst/>
@@ -6973,18 +7076,20 @@
               </a:spcAft>
             </a:pPr>
             <a:r>
-              <a:rPr sz="1300" b="1" i="0">
-                <a:solidFill>
-                  <a:srgbClr val="1B4FA8"/>
-                </a:solidFill>
+              <a:rPr sz="1600" b="1" i="0">
+                <a:solidFill>
+                  <a:srgbClr val="0066CD"/>
+                </a:solidFill>
+                <a:latin typeface="Meiryo UI"/>
               </a:rPr>
               <a:t>1. </a:t>
             </a:r>
             <a:r>
-              <a:rPr sz="1300" b="0" i="0">
+              <a:rPr sz="1600" b="0" i="0">
                 <a:solidFill>
                   <a:srgbClr val="1A1A1A"/>
                 </a:solidFill>
+                <a:latin typeface="Meiryo UI"/>
               </a:rPr>
               <a:t>経営承認: 戦略計画・予算の最終承認（期限: 4月末）</a:t>
             </a:r>
@@ -6999,18 +7104,20 @@
               </a:spcAft>
             </a:pPr>
             <a:r>
-              <a:rPr sz="1300" b="1" i="0">
-                <a:solidFill>
-                  <a:srgbClr val="1B4FA8"/>
-                </a:solidFill>
+              <a:rPr sz="1600" b="1" i="0">
+                <a:solidFill>
+                  <a:srgbClr val="0066CD"/>
+                </a:solidFill>
+                <a:latin typeface="Meiryo UI"/>
               </a:rPr>
               <a:t>2. </a:t>
             </a:r>
             <a:r>
-              <a:rPr sz="1300" b="0" i="0">
+              <a:rPr sz="1600" b="0" i="0">
                 <a:solidFill>
                   <a:srgbClr val="1A1A1A"/>
                 </a:solidFill>
+                <a:latin typeface="Meiryo UI"/>
               </a:rPr>
               <a:t>採用推進: SDR・CS人材の採用加速（目標: Q2末までに充足）</a:t>
             </a:r>
@@ -7025,18 +7132,20 @@
               </a:spcAft>
             </a:pPr>
             <a:r>
-              <a:rPr sz="1300" b="1" i="0">
-                <a:solidFill>
-                  <a:srgbClr val="1B4FA8"/>
-                </a:solidFill>
+              <a:rPr sz="1600" b="1" i="0">
+                <a:solidFill>
+                  <a:srgbClr val="0066CD"/>
+                </a:solidFill>
+                <a:latin typeface="Meiryo UI"/>
               </a:rPr>
               <a:t>3. </a:t>
             </a:r>
             <a:r>
-              <a:rPr sz="1300" b="0" i="0">
+              <a:rPr sz="1600" b="0" i="0">
                 <a:solidFill>
                   <a:srgbClr val="1A1A1A"/>
                 </a:solidFill>
+                <a:latin typeface="Meiryo UI"/>
               </a:rPr>
               <a:t>ツール導入: HubSpot・Salesforce連携設定完了（期限: 5月中旬）</a:t>
             </a:r>
@@ -7051,18 +7160,20 @@
               </a:spcAft>
             </a:pPr>
             <a:r>
-              <a:rPr sz="1300" b="1" i="0">
-                <a:solidFill>
-                  <a:srgbClr val="1B4FA8"/>
-                </a:solidFill>
+              <a:rPr sz="1600" b="1" i="0">
+                <a:solidFill>
+                  <a:srgbClr val="0066CD"/>
+                </a:solidFill>
+                <a:latin typeface="Meiryo UI"/>
               </a:rPr>
               <a:t>4. </a:t>
             </a:r>
             <a:r>
-              <a:rPr sz="1300" b="0" i="0">
+              <a:rPr sz="1600" b="0" i="0">
                 <a:solidFill>
                   <a:srgbClr val="1A1A1A"/>
                 </a:solidFill>
+                <a:latin typeface="Meiryo UI"/>
               </a:rPr>
               <a:t>KPIモニタリング: 週次ダッシュボード運用開始（期限: 4月第1週）</a:t>
             </a:r>
@@ -7085,8 +7196,8 @@
         </p:blipFill>
         <p:spPr>
           <a:xfrm>
-            <a:off x="10040112" y="73152"/>
-            <a:ext cx="2011680" cy="625706"/>
+            <a:off x="9338767" y="83210"/>
+            <a:ext cx="2016252" cy="468172"/>
           </a:xfrm>
           <a:prstGeom prst="rect">
             <a:avLst/>
@@ -7101,14 +7212,14 @@
         </p:nvSpPr>
         <p:spPr>
           <a:xfrm>
-            <a:off x="0" y="6473952"/>
-            <a:ext cx="12188952" cy="15240"/>
+            <a:off x="838504" y="6355994"/>
+            <a:ext cx="10515600" cy="19050"/>
           </a:xfrm>
           <a:prstGeom prst="rect">
             <a:avLst/>
           </a:prstGeom>
           <a:solidFill>
-            <a:srgbClr val="000000"/>
+            <a:srgbClr val="1A1A1A"/>
           </a:solidFill>
           <a:ln>
             <a:noFill/>
@@ -7145,8 +7256,8 @@
         </p:nvSpPr>
         <p:spPr>
           <a:xfrm>
-            <a:off x="457200" y="6512052"/>
-            <a:ext cx="7315200" cy="320040"/>
+            <a:off x="838504" y="6400800"/>
+            <a:ext cx="6400800" cy="228600"/>
           </a:xfrm>
           <a:prstGeom prst="rect">
             <a:avLst/>
@@ -7160,12 +7271,13 @@
           <a:lstStyle/>
           <a:p>
             <a:r>
-              <a:rPr sz="800" b="0" i="0">
-                <a:solidFill>
-                  <a:srgbClr val="808080"/>
-                </a:solidFill>
-              </a:rPr>
-              <a:t>Confidential All Rights Reserved SALESCORE Inc.</a:t>
+              <a:rPr sz="900" b="0" i="0">
+                <a:solidFill>
+                  <a:srgbClr val="888888"/>
+                </a:solidFill>
+                <a:latin typeface="Meiryo UI"/>
+              </a:rPr>
+              <a:t>Confidential All Rights Reserved SALESCORE Co., Ltd.</a:t>
             </a:r>
           </a:p>
         </p:txBody>
@@ -7178,8 +7290,8 @@
         </p:nvSpPr>
         <p:spPr>
           <a:xfrm>
-            <a:off x="11640312" y="6512052"/>
-            <a:ext cx="411480" cy="320040"/>
+            <a:off x="10515600" y="6400800"/>
+            <a:ext cx="1371600" cy="228600"/>
           </a:xfrm>
           <a:prstGeom prst="rect">
             <a:avLst/>
@@ -7194,10 +7306,11 @@
           <a:p>
             <a:pPr algn="r"/>
             <a:r>
-              <a:rPr sz="900" b="0" i="0">
-                <a:solidFill>
-                  <a:srgbClr val="808080"/>
-                </a:solidFill>
+              <a:rPr sz="1200" b="0" i="0">
+                <a:solidFill>
+                  <a:srgbClr val="888888"/>
+                </a:solidFill>
+                <a:latin typeface="Meiryo UI"/>
               </a:rPr>
               <a:t>16</a:t>
             </a:r>
@@ -7274,8 +7387,8 @@
         </p:nvSpPr>
         <p:spPr>
           <a:xfrm>
-            <a:off x="457200" y="64008"/>
-            <a:ext cx="9491472" cy="219456"/>
+            <a:off x="828446" y="64008"/>
+            <a:ext cx="8686800" cy="182880"/>
           </a:xfrm>
           <a:prstGeom prst="rect">
             <a:avLst/>
@@ -7291,8 +7404,9 @@
             <a:r>
               <a:rPr sz="900" b="1" i="0">
                 <a:solidFill>
-                  <a:srgbClr val="55657A"/>
-                </a:solidFill>
+                  <a:srgbClr val="888888"/>
+                </a:solidFill>
+                <a:latin typeface="Meiryo UI"/>
               </a:rPr>
               <a:t>5.2</a:t>
             </a:r>
@@ -7307,8 +7421,8 @@
         </p:nvSpPr>
         <p:spPr>
           <a:xfrm>
-            <a:off x="457200" y="246888"/>
-            <a:ext cx="9491472" cy="566928"/>
+            <a:off x="828446" y="252374"/>
+            <a:ext cx="8686800" cy="288036"/>
           </a:xfrm>
           <a:prstGeom prst="rect">
             <a:avLst/>
@@ -7322,10 +7436,11 @@
           <a:lstStyle/>
           <a:p>
             <a:r>
-              <a:rPr sz="2600" b="1" i="0">
+              <a:rPr sz="2100" b="1" i="0">
                 <a:solidFill>
                   <a:srgbClr val="1A1A1A"/>
                 </a:solidFill>
+                <a:latin typeface="Meiryo UI"/>
               </a:rPr>
               <a:t>まとめ</a:t>
             </a:r>
@@ -7340,14 +7455,14 @@
         </p:nvSpPr>
         <p:spPr>
           <a:xfrm>
-            <a:off x="0" y="758952"/>
-            <a:ext cx="12188952" cy="22860"/>
+            <a:off x="838504" y="630021"/>
+            <a:ext cx="10515600" cy="19050"/>
           </a:xfrm>
           <a:prstGeom prst="rect">
             <a:avLst/>
           </a:prstGeom>
           <a:solidFill>
-            <a:srgbClr val="000000"/>
+            <a:srgbClr val="1A1A1A"/>
           </a:solidFill>
           <a:ln>
             <a:noFill/>
@@ -7384,8 +7499,8 @@
         </p:nvSpPr>
         <p:spPr>
           <a:xfrm>
-            <a:off x="457200" y="923544"/>
-            <a:ext cx="11411712" cy="548640"/>
+            <a:off x="838504" y="640080"/>
+            <a:ext cx="10515600" cy="629107"/>
           </a:xfrm>
           <a:prstGeom prst="rect">
             <a:avLst/>
@@ -7399,10 +7514,11 @@
           <a:lstStyle/>
           <a:p>
             <a:r>
-              <a:rPr sz="1200" b="0" i="0">
+              <a:rPr sz="1800" b="0" i="0">
                 <a:solidFill>
                   <a:srgbClr val="1A1A1A"/>
                 </a:solidFill>
+                <a:latin typeface="Meiryo UI"/>
               </a:rPr>
               <a:t>3つの戦略柱を軸に、データドリブンな意思決定で成長を加速します。</a:t>
             </a:r>
@@ -7417,8 +7533,8 @@
         </p:nvSpPr>
         <p:spPr>
           <a:xfrm>
-            <a:off x="457200" y="1517904"/>
-            <a:ext cx="5545836" cy="320040"/>
+            <a:off x="838504" y="1280160"/>
+            <a:ext cx="5097780" cy="320040"/>
           </a:xfrm>
           <a:prstGeom prst="rect">
             <a:avLst/>
@@ -7432,10 +7548,11 @@
           <a:lstStyle/>
           <a:p>
             <a:r>
-              <a:rPr sz="1300" b="1" i="0">
+              <a:rPr sz="1400" b="1" i="0">
                 <a:solidFill>
                   <a:srgbClr val="1D3461"/>
                 </a:solidFill>
+                <a:latin typeface="Meiryo UI"/>
               </a:rPr>
               <a:t>成功のための条件</a:t>
             </a:r>
@@ -7450,8 +7567,8 @@
         </p:nvSpPr>
         <p:spPr>
           <a:xfrm>
-            <a:off x="6323076" y="1517904"/>
-            <a:ext cx="5545836" cy="320040"/>
+            <a:off x="6256324" y="1280160"/>
+            <a:ext cx="5097780" cy="320040"/>
           </a:xfrm>
           <a:prstGeom prst="rect">
             <a:avLst/>
@@ -7465,10 +7582,11 @@
           <a:lstStyle/>
           <a:p>
             <a:r>
-              <a:rPr sz="1300" b="1" i="0">
+              <a:rPr sz="1400" b="1" i="0">
                 <a:solidFill>
                   <a:srgbClr val="1D3461"/>
                 </a:solidFill>
+                <a:latin typeface="Meiryo UI"/>
               </a:rPr>
               <a:t>期待される成果</a:t>
             </a:r>
@@ -7483,8 +7601,8 @@
         </p:nvSpPr>
         <p:spPr>
           <a:xfrm>
-            <a:off x="6156706" y="1517904"/>
-            <a:ext cx="12700" cy="4864608"/>
+            <a:off x="6089954" y="1280160"/>
+            <a:ext cx="12700" cy="4984394"/>
           </a:xfrm>
           <a:prstGeom prst="rect">
             <a:avLst/>
@@ -7527,8 +7645,8 @@
         </p:nvSpPr>
         <p:spPr>
           <a:xfrm>
-            <a:off x="457200" y="1865376"/>
-            <a:ext cx="5545836" cy="2182368"/>
+            <a:off x="838504" y="1627632"/>
+            <a:ext cx="5097780" cy="2242261"/>
           </a:xfrm>
           <a:prstGeom prst="rect">
             <a:avLst/>
@@ -7550,18 +7668,20 @@
               </a:spcAft>
             </a:pPr>
             <a:r>
-              <a:rPr sz="1200" b="0" i="0">
-                <a:solidFill>
-                  <a:srgbClr val="1B4FA8"/>
-                </a:solidFill>
-              </a:rPr>
-              <a:t>• </a:t>
-            </a:r>
-            <a:r>
-              <a:rPr sz="1300" b="0" i="0">
+              <a:rPr sz="1600" b="0" i="0">
+                <a:solidFill>
+                  <a:srgbClr val="0066CD"/>
+                </a:solidFill>
+                <a:latin typeface="Meiryo UI"/>
+              </a:rPr>
+              <a:t>● </a:t>
+            </a:r>
+            <a:r>
+              <a:rPr sz="1600" b="0" i="0">
                 <a:solidFill>
                   <a:srgbClr val="1A1A1A"/>
                 </a:solidFill>
+                <a:latin typeface="Meiryo UI"/>
               </a:rPr>
               <a:t>全社的な顧客中心主義の徹底</a:t>
             </a:r>
@@ -7576,18 +7696,20 @@
               </a:spcAft>
             </a:pPr>
             <a:r>
-              <a:rPr sz="1200" b="0" i="0">
-                <a:solidFill>
-                  <a:srgbClr val="1B4FA8"/>
-                </a:solidFill>
-              </a:rPr>
-              <a:t>• </a:t>
-            </a:r>
-            <a:r>
-              <a:rPr sz="1300" b="0" i="0">
+              <a:rPr sz="1600" b="0" i="0">
+                <a:solidFill>
+                  <a:srgbClr val="0066CD"/>
+                </a:solidFill>
+                <a:latin typeface="Meiryo UI"/>
+              </a:rPr>
+              <a:t>● </a:t>
+            </a:r>
+            <a:r>
+              <a:rPr sz="1600" b="0" i="0">
                 <a:solidFill>
                   <a:srgbClr val="1A1A1A"/>
                 </a:solidFill>
+                <a:latin typeface="Meiryo UI"/>
               </a:rPr>
               <a:t>リアルタイムデータ活用基盤の整備</a:t>
             </a:r>
@@ -7602,18 +7724,20 @@
               </a:spcAft>
             </a:pPr>
             <a:r>
-              <a:rPr sz="1200" b="0" i="0">
-                <a:solidFill>
-                  <a:srgbClr val="1B4FA8"/>
-                </a:solidFill>
-              </a:rPr>
-              <a:t>• </a:t>
-            </a:r>
-            <a:r>
-              <a:rPr sz="1300" b="0" i="0">
+              <a:rPr sz="1600" b="0" i="0">
+                <a:solidFill>
+                  <a:srgbClr val="0066CD"/>
+                </a:solidFill>
+                <a:latin typeface="Meiryo UI"/>
+              </a:rPr>
+              <a:t>● </a:t>
+            </a:r>
+            <a:r>
+              <a:rPr sz="1600" b="0" i="0">
                 <a:solidFill>
                   <a:srgbClr val="1A1A1A"/>
                 </a:solidFill>
+                <a:latin typeface="Meiryo UI"/>
               </a:rPr>
               <a:t>部門横断コラボレーションの強化</a:t>
             </a:r>
@@ -7628,8 +7752,8 @@
         </p:nvSpPr>
         <p:spPr>
           <a:xfrm>
-            <a:off x="457200" y="4098544"/>
-            <a:ext cx="5545836" cy="12700"/>
+            <a:off x="838504" y="3920693"/>
+            <a:ext cx="5097780" cy="12700"/>
           </a:xfrm>
           <a:prstGeom prst="rect">
             <a:avLst/>
@@ -7672,8 +7796,8 @@
         </p:nvSpPr>
         <p:spPr>
           <a:xfrm>
-            <a:off x="457200" y="4200144"/>
-            <a:ext cx="5545836" cy="2182368"/>
+            <a:off x="838504" y="4022293"/>
+            <a:ext cx="5097780" cy="2242261"/>
           </a:xfrm>
           <a:prstGeom prst="rect">
             <a:avLst/>
@@ -7695,18 +7819,20 @@
               </a:spcAft>
             </a:pPr>
             <a:r>
-              <a:rPr sz="1200" b="0" i="0">
-                <a:solidFill>
-                  <a:srgbClr val="1B4FA8"/>
-                </a:solidFill>
-              </a:rPr>
-              <a:t>• </a:t>
-            </a:r>
-            <a:r>
-              <a:rPr sz="1300" b="0" i="0">
+              <a:rPr sz="1600" b="0" i="0">
+                <a:solidFill>
+                  <a:srgbClr val="0066CD"/>
+                </a:solidFill>
+                <a:latin typeface="Meiryo UI"/>
+              </a:rPr>
+              <a:t>● </a:t>
+            </a:r>
+            <a:r>
+              <a:rPr sz="1600" b="0" i="0">
                 <a:solidFill>
                   <a:srgbClr val="1A1A1A"/>
                 </a:solidFill>
+                <a:latin typeface="Meiryo UI"/>
               </a:rPr>
               <a:t>月次レビュー会議の定例化</a:t>
             </a:r>
@@ -7721,18 +7847,20 @@
               </a:spcAft>
             </a:pPr>
             <a:r>
-              <a:rPr sz="1200" b="0" i="0">
-                <a:solidFill>
-                  <a:srgbClr val="1B4FA8"/>
-                </a:solidFill>
-              </a:rPr>
-              <a:t>• </a:t>
-            </a:r>
-            <a:r>
-              <a:rPr sz="1300" b="0" i="0">
+              <a:rPr sz="1600" b="0" i="0">
+                <a:solidFill>
+                  <a:srgbClr val="0066CD"/>
+                </a:solidFill>
+                <a:latin typeface="Meiryo UI"/>
+              </a:rPr>
+              <a:t>● </a:t>
+            </a:r>
+            <a:r>
+              <a:rPr sz="1600" b="0" i="0">
                 <a:solidFill>
                   <a:srgbClr val="1A1A1A"/>
                 </a:solidFill>
+                <a:latin typeface="Meiryo UI"/>
               </a:rPr>
               <a:t>OKRによる目標管理の導入</a:t>
             </a:r>
@@ -7747,8 +7875,8 @@
         </p:nvSpPr>
         <p:spPr>
           <a:xfrm>
-            <a:off x="6323076" y="1865376"/>
-            <a:ext cx="5545836" cy="2182368"/>
+            <a:off x="6256324" y="1627632"/>
+            <a:ext cx="5097780" cy="2242261"/>
           </a:xfrm>
           <a:prstGeom prst="rect">
             <a:avLst/>
@@ -7770,18 +7898,20 @@
               </a:spcAft>
             </a:pPr>
             <a:r>
-              <a:rPr sz="1200" b="0" i="0">
-                <a:solidFill>
-                  <a:srgbClr val="1B4FA8"/>
-                </a:solidFill>
-              </a:rPr>
-              <a:t>• </a:t>
-            </a:r>
-            <a:r>
-              <a:rPr sz="1300" b="0" i="0">
+              <a:rPr sz="1600" b="0" i="0">
+                <a:solidFill>
+                  <a:srgbClr val="0066CD"/>
+                </a:solidFill>
+                <a:latin typeface="Meiryo UI"/>
+              </a:rPr>
+              <a:t>● </a:t>
+            </a:r>
+            <a:r>
+              <a:rPr sz="1600" b="0" i="0">
                 <a:solidFill>
                   <a:srgbClr val="1A1A1A"/>
                 </a:solidFill>
+                <a:latin typeface="Meiryo UI"/>
               </a:rPr>
               <a:t>2026年末: MRR 3億6千万円達成</a:t>
             </a:r>
@@ -7796,18 +7926,20 @@
               </a:spcAft>
             </a:pPr>
             <a:r>
-              <a:rPr sz="1200" b="0" i="0">
-                <a:solidFill>
-                  <a:srgbClr val="1B4FA8"/>
-                </a:solidFill>
-              </a:rPr>
-              <a:t>• </a:t>
-            </a:r>
-            <a:r>
-              <a:rPr sz="1300" b="0" i="0">
+              <a:rPr sz="1600" b="0" i="0">
+                <a:solidFill>
+                  <a:srgbClr val="0066CD"/>
+                </a:solidFill>
+                <a:latin typeface="Meiryo UI"/>
+              </a:rPr>
+              <a:t>● </a:t>
+            </a:r>
+            <a:r>
+              <a:rPr sz="1600" b="0" i="0">
                 <a:solidFill>
                   <a:srgbClr val="1A1A1A"/>
                 </a:solidFill>
+                <a:latin typeface="Meiryo UI"/>
               </a:rPr>
               <a:t>チャーンレート: 1.0%以下へ改善</a:t>
             </a:r>
@@ -7822,18 +7954,20 @@
               </a:spcAft>
             </a:pPr>
             <a:r>
-              <a:rPr sz="1200" b="0" i="0">
-                <a:solidFill>
-                  <a:srgbClr val="1B4FA8"/>
-                </a:solidFill>
-              </a:rPr>
-              <a:t>• </a:t>
-            </a:r>
-            <a:r>
-              <a:rPr sz="1300" b="0" i="0">
+              <a:rPr sz="1600" b="0" i="0">
+                <a:solidFill>
+                  <a:srgbClr val="0066CD"/>
+                </a:solidFill>
+                <a:latin typeface="Meiryo UI"/>
+              </a:rPr>
+              <a:t>● </a:t>
+            </a:r>
+            <a:r>
+              <a:rPr sz="1600" b="0" i="0">
                 <a:solidFill>
                   <a:srgbClr val="1A1A1A"/>
                 </a:solidFill>
+                <a:latin typeface="Meiryo UI"/>
               </a:rPr>
               <a:t>NPS: 60以上を維持</a:t>
             </a:r>
@@ -7848,8 +7982,8 @@
         </p:nvSpPr>
         <p:spPr>
           <a:xfrm>
-            <a:off x="6323076" y="4098544"/>
-            <a:ext cx="5545836" cy="12700"/>
+            <a:off x="6256324" y="3920693"/>
+            <a:ext cx="5097780" cy="12700"/>
           </a:xfrm>
           <a:prstGeom prst="rect">
             <a:avLst/>
@@ -7892,8 +8026,8 @@
         </p:nvSpPr>
         <p:spPr>
           <a:xfrm>
-            <a:off x="6323076" y="4200144"/>
-            <a:ext cx="5545836" cy="2182368"/>
+            <a:off x="6256324" y="4022293"/>
+            <a:ext cx="5097780" cy="2242261"/>
           </a:xfrm>
           <a:prstGeom prst="rect">
             <a:avLst/>
@@ -7915,18 +8049,20 @@
               </a:spcAft>
             </a:pPr>
             <a:r>
-              <a:rPr sz="1200" b="0" i="0">
-                <a:solidFill>
-                  <a:srgbClr val="1B4FA8"/>
-                </a:solidFill>
-              </a:rPr>
-              <a:t>• </a:t>
-            </a:r>
-            <a:r>
-              <a:rPr sz="1300" b="0" i="0">
+              <a:rPr sz="1600" b="0" i="0">
+                <a:solidFill>
+                  <a:srgbClr val="0066CD"/>
+                </a:solidFill>
+                <a:latin typeface="Meiryo UI"/>
+              </a:rPr>
+              <a:t>● </a:t>
+            </a:r>
+            <a:r>
+              <a:rPr sz="1600" b="0" i="0">
                 <a:solidFill>
                   <a:srgbClr val="1A1A1A"/>
                 </a:solidFill>
+                <a:latin typeface="Meiryo UI"/>
               </a:rPr>
               <a:t>エンタープライズ比率: 50%へ</a:t>
             </a:r>
@@ -7941,18 +8077,20 @@
               </a:spcAft>
             </a:pPr>
             <a:r>
-              <a:rPr sz="1200" b="0" i="0">
-                <a:solidFill>
-                  <a:srgbClr val="1B4FA8"/>
-                </a:solidFill>
-              </a:rPr>
-              <a:t>• </a:t>
-            </a:r>
-            <a:r>
-              <a:rPr sz="1300" b="0" i="0">
+              <a:rPr sz="1600" b="0" i="0">
+                <a:solidFill>
+                  <a:srgbClr val="0066CD"/>
+                </a:solidFill>
+                <a:latin typeface="Meiryo UI"/>
+              </a:rPr>
+              <a:t>● </a:t>
+            </a:r>
+            <a:r>
+              <a:rPr sz="1600" b="0" i="0">
                 <a:solidFill>
                   <a:srgbClr val="1A1A1A"/>
                 </a:solidFill>
+                <a:latin typeface="Meiryo UI"/>
               </a:rPr>
               <a:t>パートナー経由比率: 30%へ</a:t>
             </a:r>
@@ -7975,8 +8113,8 @@
         </p:blipFill>
         <p:spPr>
           <a:xfrm>
-            <a:off x="10040112" y="73152"/>
-            <a:ext cx="2011680" cy="625706"/>
+            <a:off x="9338767" y="83210"/>
+            <a:ext cx="2016252" cy="468172"/>
           </a:xfrm>
           <a:prstGeom prst="rect">
             <a:avLst/>
@@ -7991,14 +8129,14 @@
         </p:nvSpPr>
         <p:spPr>
           <a:xfrm>
-            <a:off x="0" y="6473952"/>
-            <a:ext cx="12188952" cy="15240"/>
+            <a:off x="838504" y="6355994"/>
+            <a:ext cx="10515600" cy="19050"/>
           </a:xfrm>
           <a:prstGeom prst="rect">
             <a:avLst/>
           </a:prstGeom>
           <a:solidFill>
-            <a:srgbClr val="000000"/>
+            <a:srgbClr val="1A1A1A"/>
           </a:solidFill>
           <a:ln>
             <a:noFill/>
@@ -8035,8 +8173,8 @@
         </p:nvSpPr>
         <p:spPr>
           <a:xfrm>
-            <a:off x="457200" y="6512052"/>
-            <a:ext cx="7315200" cy="320040"/>
+            <a:off x="838504" y="6400800"/>
+            <a:ext cx="6400800" cy="228600"/>
           </a:xfrm>
           <a:prstGeom prst="rect">
             <a:avLst/>
@@ -8050,12 +8188,13 @@
           <a:lstStyle/>
           <a:p>
             <a:r>
-              <a:rPr sz="800" b="0" i="0">
-                <a:solidFill>
-                  <a:srgbClr val="808080"/>
-                </a:solidFill>
-              </a:rPr>
-              <a:t>Confidential All Rights Reserved SALESCORE Inc.</a:t>
+              <a:rPr sz="900" b="0" i="0">
+                <a:solidFill>
+                  <a:srgbClr val="888888"/>
+                </a:solidFill>
+                <a:latin typeface="Meiryo UI"/>
+              </a:rPr>
+              <a:t>Confidential All Rights Reserved SALESCORE Co., Ltd.</a:t>
             </a:r>
           </a:p>
         </p:txBody>
@@ -8068,8 +8207,8 @@
         </p:nvSpPr>
         <p:spPr>
           <a:xfrm>
-            <a:off x="11640312" y="6512052"/>
-            <a:ext cx="411480" cy="320040"/>
+            <a:off x="10515600" y="6400800"/>
+            <a:ext cx="1371600" cy="228600"/>
           </a:xfrm>
           <a:prstGeom prst="rect">
             <a:avLst/>
@@ -8084,10 +8223,11 @@
           <a:p>
             <a:pPr algn="r"/>
             <a:r>
-              <a:rPr sz="900" b="0" i="0">
-                <a:solidFill>
-                  <a:srgbClr val="808080"/>
-                </a:solidFill>
+              <a:rPr sz="1200" b="0" i="0">
+                <a:solidFill>
+                  <a:srgbClr val="888888"/>
+                </a:solidFill>
+                <a:latin typeface="Meiryo UI"/>
               </a:rPr>
               <a:t>17</a:t>
             </a:r>
@@ -8183,6 +8323,7 @@
                 <a:solidFill>
                   <a:srgbClr val="FFFFFF"/>
                 </a:solidFill>
+                <a:latin typeface="Meiryo UI"/>
               </a:rPr>
               <a:t>1. エグゼクティブサマリー</a:t>
             </a:r>
@@ -8249,8 +8390,8 @@
         </p:blipFill>
         <p:spPr>
           <a:xfrm>
-            <a:off x="10040112" y="73152"/>
-            <a:ext cx="2011680" cy="625706"/>
+            <a:off x="9338767" y="83210"/>
+            <a:ext cx="2016252" cy="468172"/>
           </a:xfrm>
           <a:prstGeom prst="rect">
             <a:avLst/>
@@ -8265,14 +8406,14 @@
         </p:nvSpPr>
         <p:spPr>
           <a:xfrm>
-            <a:off x="0" y="6473952"/>
-            <a:ext cx="12188952" cy="15240"/>
+            <a:off x="838504" y="6355994"/>
+            <a:ext cx="10515600" cy="19050"/>
           </a:xfrm>
           <a:prstGeom prst="rect">
             <a:avLst/>
           </a:prstGeom>
           <a:solidFill>
-            <a:srgbClr val="000000"/>
+            <a:srgbClr val="1A1A1A"/>
           </a:solidFill>
           <a:ln>
             <a:noFill/>
@@ -8309,8 +8450,8 @@
         </p:nvSpPr>
         <p:spPr>
           <a:xfrm>
-            <a:off x="457200" y="6512052"/>
-            <a:ext cx="7315200" cy="320040"/>
+            <a:off x="838504" y="6400800"/>
+            <a:ext cx="6400800" cy="228600"/>
           </a:xfrm>
           <a:prstGeom prst="rect">
             <a:avLst/>
@@ -8324,12 +8465,13 @@
           <a:lstStyle/>
           <a:p>
             <a:r>
-              <a:rPr sz="800" b="0" i="0">
-                <a:solidFill>
-                  <a:srgbClr val="808080"/>
-                </a:solidFill>
-              </a:rPr>
-              <a:t>Confidential All Rights Reserved SALESCORE Inc.</a:t>
+              <a:rPr sz="900" b="0" i="0">
+                <a:solidFill>
+                  <a:srgbClr val="888888"/>
+                </a:solidFill>
+                <a:latin typeface="Meiryo UI"/>
+              </a:rPr>
+              <a:t>Confidential All Rights Reserved SALESCORE Co., Ltd.</a:t>
             </a:r>
           </a:p>
         </p:txBody>
@@ -8342,8 +8484,8 @@
         </p:nvSpPr>
         <p:spPr>
           <a:xfrm>
-            <a:off x="11640312" y="6512052"/>
-            <a:ext cx="411480" cy="320040"/>
+            <a:off x="10515600" y="6400800"/>
+            <a:ext cx="1371600" cy="228600"/>
           </a:xfrm>
           <a:prstGeom prst="rect">
             <a:avLst/>
@@ -8358,10 +8500,11 @@
           <a:p>
             <a:pPr algn="r"/>
             <a:r>
-              <a:rPr sz="900" b="0" i="0">
-                <a:solidFill>
-                  <a:srgbClr val="808080"/>
-                </a:solidFill>
+              <a:rPr sz="1200" b="0" i="0">
+                <a:solidFill>
+                  <a:srgbClr val="888888"/>
+                </a:solidFill>
+                <a:latin typeface="Meiryo UI"/>
               </a:rPr>
               <a:t>2</a:t>
             </a:r>
@@ -8438,8 +8581,8 @@
         </p:nvSpPr>
         <p:spPr>
           <a:xfrm>
-            <a:off x="457200" y="64008"/>
-            <a:ext cx="9491472" cy="219456"/>
+            <a:off x="828446" y="64008"/>
+            <a:ext cx="8686800" cy="182880"/>
           </a:xfrm>
           <a:prstGeom prst="rect">
             <a:avLst/>
@@ -8455,8 +8598,9 @@
             <a:r>
               <a:rPr sz="900" b="1" i="0">
                 <a:solidFill>
-                  <a:srgbClr val="55657A"/>
-                </a:solidFill>
+                  <a:srgbClr val="888888"/>
+                </a:solidFill>
+                <a:latin typeface="Meiryo UI"/>
               </a:rPr>
               <a:t>1.1</a:t>
             </a:r>
@@ -8471,8 +8615,8 @@
         </p:nvSpPr>
         <p:spPr>
           <a:xfrm>
-            <a:off x="457200" y="246888"/>
-            <a:ext cx="9491472" cy="566928"/>
+            <a:off x="828446" y="252374"/>
+            <a:ext cx="8686800" cy="288036"/>
           </a:xfrm>
           <a:prstGeom prst="rect">
             <a:avLst/>
@@ -8486,10 +8630,11 @@
           <a:lstStyle/>
           <a:p>
             <a:r>
-              <a:rPr sz="2600" b="1" i="0">
+              <a:rPr sz="2100" b="1" i="0">
                 <a:solidFill>
                   <a:srgbClr val="1A1A1A"/>
                 </a:solidFill>
+                <a:latin typeface="Meiryo UI"/>
               </a:rPr>
               <a:t>概要・主要メッセージ</a:t>
             </a:r>
@@ -8504,14 +8649,14 @@
         </p:nvSpPr>
         <p:spPr>
           <a:xfrm>
-            <a:off x="0" y="758952"/>
-            <a:ext cx="12188952" cy="22860"/>
+            <a:off x="838504" y="630021"/>
+            <a:ext cx="10515600" cy="19050"/>
           </a:xfrm>
           <a:prstGeom prst="rect">
             <a:avLst/>
           </a:prstGeom>
           <a:solidFill>
-            <a:srgbClr val="000000"/>
+            <a:srgbClr val="1A1A1A"/>
           </a:solidFill>
           <a:ln>
             <a:noFill/>
@@ -8548,8 +8693,8 @@
         </p:nvSpPr>
         <p:spPr>
           <a:xfrm>
-            <a:off x="457200" y="923544"/>
-            <a:ext cx="11411712" cy="548640"/>
+            <a:off x="838504" y="640080"/>
+            <a:ext cx="10515600" cy="629107"/>
           </a:xfrm>
           <a:prstGeom prst="rect">
             <a:avLst/>
@@ -8563,10 +8708,11 @@
           <a:lstStyle/>
           <a:p>
             <a:r>
-              <a:rPr sz="1200" b="0" i="0">
+              <a:rPr sz="1800" b="0" i="0">
                 <a:solidFill>
                   <a:srgbClr val="1A1A1A"/>
                 </a:solidFill>
+                <a:latin typeface="Meiryo UI"/>
               </a:rPr>
               <a:t>本資料は2026年度の市場動向分析と戦略提言をまとめたものです。各部門のデータを統合し、成長機会を明確化します。</a:t>
             </a:r>
@@ -8581,8 +8727,8 @@
         </p:nvSpPr>
         <p:spPr>
           <a:xfrm>
-            <a:off x="457200" y="1517904"/>
-            <a:ext cx="11411712" cy="4864608"/>
+            <a:off x="838504" y="1280160"/>
+            <a:ext cx="10515600" cy="4984394"/>
           </a:xfrm>
           <a:prstGeom prst="rect">
             <a:avLst/>
@@ -8604,18 +8750,20 @@
               </a:spcAft>
             </a:pPr>
             <a:r>
-              <a:rPr sz="1200" b="0" i="0">
-                <a:solidFill>
-                  <a:srgbClr val="1B4FA8"/>
-                </a:solidFill>
-              </a:rPr>
-              <a:t>• </a:t>
-            </a:r>
-            <a:r>
-              <a:rPr sz="1300" b="0" i="0">
+              <a:rPr sz="1600" b="0" i="0">
+                <a:solidFill>
+                  <a:srgbClr val="0066CD"/>
+                </a:solidFill>
+                <a:latin typeface="Meiryo UI"/>
+              </a:rPr>
+              <a:t>● </a:t>
+            </a:r>
+            <a:r>
+              <a:rPr sz="1600" b="0" i="0">
                 <a:solidFill>
                   <a:srgbClr val="1A1A1A"/>
                 </a:solidFill>
+                <a:latin typeface="Meiryo UI"/>
               </a:rPr>
               <a:t>売上目標: 前年比130%達成を目指す</a:t>
             </a:r>
@@ -8630,18 +8778,20 @@
               </a:spcAft>
             </a:pPr>
             <a:r>
-              <a:rPr sz="1200" b="0" i="0">
-                <a:solidFill>
-                  <a:srgbClr val="1B4FA8"/>
-                </a:solidFill>
-              </a:rPr>
-              <a:t>• </a:t>
-            </a:r>
-            <a:r>
-              <a:rPr sz="1300" b="0" i="0">
+              <a:rPr sz="1600" b="0" i="0">
+                <a:solidFill>
+                  <a:srgbClr val="0066CD"/>
+                </a:solidFill>
+                <a:latin typeface="Meiryo UI"/>
+              </a:rPr>
+              <a:t>● </a:t>
+            </a:r>
+            <a:r>
+              <a:rPr sz="1600" b="0" i="0">
                 <a:solidFill>
                   <a:srgbClr val="1A1A1A"/>
                 </a:solidFill>
+                <a:latin typeface="Meiryo UI"/>
               </a:rPr>
               <a:t>重点市場: エンタープライズ・中堅企業セグメント</a:t>
             </a:r>
@@ -8656,18 +8806,20 @@
               </a:spcAft>
             </a:pPr>
             <a:r>
-              <a:rPr sz="1200" b="0" i="0">
-                <a:solidFill>
-                  <a:srgbClr val="1B4FA8"/>
-                </a:solidFill>
-              </a:rPr>
-              <a:t>• </a:t>
-            </a:r>
-            <a:r>
-              <a:rPr sz="1300" b="0" i="0">
+              <a:rPr sz="1600" b="0" i="0">
+                <a:solidFill>
+                  <a:srgbClr val="0066CD"/>
+                </a:solidFill>
+                <a:latin typeface="Meiryo UI"/>
+              </a:rPr>
+              <a:t>● </a:t>
+            </a:r>
+            <a:r>
+              <a:rPr sz="1600" b="0" i="0">
                 <a:solidFill>
                   <a:srgbClr val="1A1A1A"/>
                 </a:solidFill>
+                <a:latin typeface="Meiryo UI"/>
               </a:rPr>
               <a:t>主要施策: 3つの柱（獲得・育成・維持）に集約</a:t>
             </a:r>
@@ -8690,8 +8842,8 @@
         </p:blipFill>
         <p:spPr>
           <a:xfrm>
-            <a:off x="10040112" y="73152"/>
-            <a:ext cx="2011680" cy="625706"/>
+            <a:off x="9338767" y="83210"/>
+            <a:ext cx="2016252" cy="468172"/>
           </a:xfrm>
           <a:prstGeom prst="rect">
             <a:avLst/>
@@ -8706,14 +8858,14 @@
         </p:nvSpPr>
         <p:spPr>
           <a:xfrm>
-            <a:off x="0" y="6473952"/>
-            <a:ext cx="12188952" cy="15240"/>
+            <a:off x="838504" y="6355994"/>
+            <a:ext cx="10515600" cy="19050"/>
           </a:xfrm>
           <a:prstGeom prst="rect">
             <a:avLst/>
           </a:prstGeom>
           <a:solidFill>
-            <a:srgbClr val="000000"/>
+            <a:srgbClr val="1A1A1A"/>
           </a:solidFill>
           <a:ln>
             <a:noFill/>
@@ -8750,8 +8902,8 @@
         </p:nvSpPr>
         <p:spPr>
           <a:xfrm>
-            <a:off x="457200" y="6512052"/>
-            <a:ext cx="7315200" cy="320040"/>
+            <a:off x="838504" y="6400800"/>
+            <a:ext cx="6400800" cy="228600"/>
           </a:xfrm>
           <a:prstGeom prst="rect">
             <a:avLst/>
@@ -8765,12 +8917,13 @@
           <a:lstStyle/>
           <a:p>
             <a:r>
-              <a:rPr sz="800" b="0" i="0">
-                <a:solidFill>
-                  <a:srgbClr val="808080"/>
-                </a:solidFill>
-              </a:rPr>
-              <a:t>Confidential All Rights Reserved SALESCORE Inc.</a:t>
+              <a:rPr sz="900" b="0" i="0">
+                <a:solidFill>
+                  <a:srgbClr val="888888"/>
+                </a:solidFill>
+                <a:latin typeface="Meiryo UI"/>
+              </a:rPr>
+              <a:t>Confidential All Rights Reserved SALESCORE Co., Ltd.</a:t>
             </a:r>
           </a:p>
         </p:txBody>
@@ -8783,8 +8936,8 @@
         </p:nvSpPr>
         <p:spPr>
           <a:xfrm>
-            <a:off x="11640312" y="6512052"/>
-            <a:ext cx="411480" cy="320040"/>
+            <a:off x="10515600" y="6400800"/>
+            <a:ext cx="1371600" cy="228600"/>
           </a:xfrm>
           <a:prstGeom prst="rect">
             <a:avLst/>
@@ -8799,10 +8952,11 @@
           <a:p>
             <a:pPr algn="r"/>
             <a:r>
-              <a:rPr sz="900" b="0" i="0">
-                <a:solidFill>
-                  <a:srgbClr val="808080"/>
-                </a:solidFill>
+              <a:rPr sz="1200" b="0" i="0">
+                <a:solidFill>
+                  <a:srgbClr val="888888"/>
+                </a:solidFill>
+                <a:latin typeface="Meiryo UI"/>
               </a:rPr>
               <a:t>3</a:t>
             </a:r>
@@ -8879,8 +9033,8 @@
         </p:nvSpPr>
         <p:spPr>
           <a:xfrm>
-            <a:off x="457200" y="64008"/>
-            <a:ext cx="9491472" cy="219456"/>
+            <a:off x="828446" y="64008"/>
+            <a:ext cx="8686800" cy="182880"/>
           </a:xfrm>
           <a:prstGeom prst="rect">
             <a:avLst/>
@@ -8896,8 +9050,9 @@
             <a:r>
               <a:rPr sz="900" b="1" i="0">
                 <a:solidFill>
-                  <a:srgbClr val="55657A"/>
-                </a:solidFill>
+                  <a:srgbClr val="888888"/>
+                </a:solidFill>
+                <a:latin typeface="Meiryo UI"/>
               </a:rPr>
               <a:t>1.2</a:t>
             </a:r>
@@ -8912,8 +9067,8 @@
         </p:nvSpPr>
         <p:spPr>
           <a:xfrm>
-            <a:off x="457200" y="246888"/>
-            <a:ext cx="9491472" cy="566928"/>
+            <a:off x="828446" y="252374"/>
+            <a:ext cx="8686800" cy="288036"/>
           </a:xfrm>
           <a:prstGeom prst="rect">
             <a:avLst/>
@@ -8927,10 +9082,11 @@
           <a:lstStyle/>
           <a:p>
             <a:r>
-              <a:rPr sz="2600" b="1" i="0">
+              <a:rPr sz="2100" b="1" i="0">
                 <a:solidFill>
                   <a:srgbClr val="1A1A1A"/>
                 </a:solidFill>
+                <a:latin typeface="Meiryo UI"/>
               </a:rPr>
               <a:t>KPI サマリー</a:t>
             </a:r>
@@ -8945,14 +9101,14 @@
         </p:nvSpPr>
         <p:spPr>
           <a:xfrm>
-            <a:off x="0" y="758952"/>
-            <a:ext cx="12188952" cy="22860"/>
+            <a:off x="838504" y="630021"/>
+            <a:ext cx="10515600" cy="19050"/>
           </a:xfrm>
           <a:prstGeom prst="rect">
             <a:avLst/>
           </a:prstGeom>
           <a:solidFill>
-            <a:srgbClr val="000000"/>
+            <a:srgbClr val="1A1A1A"/>
           </a:solidFill>
           <a:ln>
             <a:noFill/>
@@ -8989,8 +9145,8 @@
         </p:nvSpPr>
         <p:spPr>
           <a:xfrm>
-            <a:off x="457200" y="923544"/>
-            <a:ext cx="11411712" cy="548640"/>
+            <a:off x="838504" y="640080"/>
+            <a:ext cx="10515600" cy="629107"/>
           </a:xfrm>
           <a:prstGeom prst="rect">
             <a:avLst/>
@@ -9004,10 +9160,11 @@
           <a:lstStyle/>
           <a:p>
             <a:r>
-              <a:rPr sz="1200" b="0" i="0">
+              <a:rPr sz="1800" b="0" i="0">
                 <a:solidFill>
                   <a:srgbClr val="1A1A1A"/>
                 </a:solidFill>
+                <a:latin typeface="Meiryo UI"/>
               </a:rPr>
               <a:t>四半期ごとの主要指標を一覧で確認できます。</a:t>
             </a:r>
@@ -9023,8 +9180,8 @@
           <p:nvPr/>
         </p:nvGraphicFramePr>
         <p:xfrm>
-          <a:off x="457200" y="1517904"/>
-          <a:ext cx="11411710" cy="1645920"/>
+          <a:off x="838504" y="1280160"/>
+          <a:ext cx="10515600" cy="1645920"/>
         </p:xfrm>
         <a:graphic>
           <a:graphicData uri="http://schemas.openxmlformats.org/drawingml/2006/table">
@@ -9033,11 +9190,11 @@
                 <a:tableStyleId>{5C22544A-7EE6-4342-B048-85BDC9FD1C3A}</a:tableStyleId>
               </a:tblPr>
               <a:tblGrid>
-                <a:gridCol w="2282342"/>
-                <a:gridCol w="2282342"/>
-                <a:gridCol w="2282342"/>
-                <a:gridCol w="2282342"/>
-                <a:gridCol w="2282342"/>
+                <a:gridCol w="2103120"/>
+                <a:gridCol w="2103120"/>
+                <a:gridCol w="2103120"/>
+                <a:gridCol w="2103120"/>
+                <a:gridCol w="2103120"/>
               </a:tblGrid>
               <a:tr h="365760">
                 <a:tc>
@@ -9047,10 +9204,11 @@
                     <a:p>
                       <a:pPr algn="ctr"/>
                       <a:r>
-                        <a:rPr sz="1100" b="1" i="0">
+                        <a:rPr sz="1400" b="1" i="0">
                           <a:solidFill>
                             <a:srgbClr val="FFFFFF"/>
                           </a:solidFill>
+                          <a:latin typeface="Meiryo UI"/>
                         </a:rPr>
                         <a:t>指標</a:t>
                       </a:r>
@@ -9069,10 +9227,11 @@
                     <a:p>
                       <a:pPr algn="ctr"/>
                       <a:r>
-                        <a:rPr sz="1100" b="1" i="0">
+                        <a:rPr sz="1400" b="1" i="0">
                           <a:solidFill>
                             <a:srgbClr val="FFFFFF"/>
                           </a:solidFill>
+                          <a:latin typeface="Meiryo UI"/>
                         </a:rPr>
                         <a:t>Q1実績</a:t>
                       </a:r>
@@ -9091,10 +9250,11 @@
                     <a:p>
                       <a:pPr algn="ctr"/>
                       <a:r>
-                        <a:rPr sz="1100" b="1" i="0">
+                        <a:rPr sz="1400" b="1" i="0">
                           <a:solidFill>
                             <a:srgbClr val="FFFFFF"/>
                           </a:solidFill>
+                          <a:latin typeface="Meiryo UI"/>
                         </a:rPr>
                         <a:t>Q2実績</a:t>
                       </a:r>
@@ -9113,10 +9273,11 @@
                     <a:p>
                       <a:pPr algn="ctr"/>
                       <a:r>
-                        <a:rPr sz="1100" b="1" i="0">
+                        <a:rPr sz="1400" b="1" i="0">
                           <a:solidFill>
                             <a:srgbClr val="FFFFFF"/>
                           </a:solidFill>
+                          <a:latin typeface="Meiryo UI"/>
                         </a:rPr>
                         <a:t>Q3実績</a:t>
                       </a:r>
@@ -9135,10 +9296,11 @@
                     <a:p>
                       <a:pPr algn="ctr"/>
                       <a:r>
-                        <a:rPr sz="1100" b="1" i="0">
+                        <a:rPr sz="1400" b="1" i="0">
                           <a:solidFill>
                             <a:srgbClr val="FFFFFF"/>
                           </a:solidFill>
+                          <a:latin typeface="Meiryo UI"/>
                         </a:rPr>
                         <a:t>Q4目標</a:t>
                       </a:r>
@@ -9159,10 +9321,11 @@
                     <a:p>
                       <a:pPr algn="l"/>
                       <a:r>
-                        <a:rPr sz="1100" b="0" i="0">
+                        <a:rPr sz="1400" b="0" i="0">
                           <a:solidFill>
                             <a:srgbClr val="1A1A1A"/>
                           </a:solidFill>
+                          <a:latin typeface="Meiryo UI"/>
                         </a:rPr>
                         <a:t>新規契約数</a:t>
                       </a:r>
@@ -9181,10 +9344,11 @@
                     <a:p>
                       <a:pPr algn="l"/>
                       <a:r>
-                        <a:rPr sz="1100" b="0" i="0">
+                        <a:rPr sz="1400" b="0" i="0">
                           <a:solidFill>
                             <a:srgbClr val="1A1A1A"/>
                           </a:solidFill>
+                          <a:latin typeface="Meiryo UI"/>
                         </a:rPr>
                         <a:t>42件</a:t>
                       </a:r>
@@ -9203,10 +9367,11 @@
                     <a:p>
                       <a:pPr algn="l"/>
                       <a:r>
-                        <a:rPr sz="1100" b="0" i="0">
+                        <a:rPr sz="1400" b="0" i="0">
                           <a:solidFill>
                             <a:srgbClr val="1A1A1A"/>
                           </a:solidFill>
+                          <a:latin typeface="Meiryo UI"/>
                         </a:rPr>
                         <a:t>58件</a:t>
                       </a:r>
@@ -9225,10 +9390,11 @@
                     <a:p>
                       <a:pPr algn="l"/>
                       <a:r>
-                        <a:rPr sz="1100" b="0" i="0">
+                        <a:rPr sz="1400" b="0" i="0">
                           <a:solidFill>
                             <a:srgbClr val="1A1A1A"/>
                           </a:solidFill>
+                          <a:latin typeface="Meiryo UI"/>
                         </a:rPr>
                         <a:t>71件</a:t>
                       </a:r>
@@ -9247,10 +9413,11 @@
                     <a:p>
                       <a:pPr algn="l"/>
                       <a:r>
-                        <a:rPr sz="1100" b="0" i="0">
+                        <a:rPr sz="1400" b="0" i="0">
                           <a:solidFill>
                             <a:srgbClr val="1A1A1A"/>
                           </a:solidFill>
+                          <a:latin typeface="Meiryo UI"/>
                         </a:rPr>
                         <a:t>90件</a:t>
                       </a:r>
@@ -9271,10 +9438,11 @@
                     <a:p>
                       <a:pPr algn="l"/>
                       <a:r>
-                        <a:rPr sz="1100" b="0" i="0">
+                        <a:rPr sz="1400" b="0" i="0">
                           <a:solidFill>
                             <a:srgbClr val="1A1A1A"/>
                           </a:solidFill>
+                          <a:latin typeface="Meiryo UI"/>
                         </a:rPr>
                         <a:t>MRR（万円）</a:t>
                       </a:r>
@@ -9293,10 +9461,11 @@
                     <a:p>
                       <a:pPr algn="l"/>
                       <a:r>
-                        <a:rPr sz="1100" b="0" i="0">
+                        <a:rPr sz="1400" b="0" i="0">
                           <a:solidFill>
                             <a:srgbClr val="1A1A1A"/>
                           </a:solidFill>
+                          <a:latin typeface="Meiryo UI"/>
                         </a:rPr>
                         <a:t>1,200</a:t>
                       </a:r>
@@ -9315,10 +9484,11 @@
                     <a:p>
                       <a:pPr algn="l"/>
                       <a:r>
-                        <a:rPr sz="1100" b="0" i="0">
+                        <a:rPr sz="1400" b="0" i="0">
                           <a:solidFill>
                             <a:srgbClr val="1A1A1A"/>
                           </a:solidFill>
+                          <a:latin typeface="Meiryo UI"/>
                         </a:rPr>
                         <a:t>1,580</a:t>
                       </a:r>
@@ -9337,10 +9507,11 @@
                     <a:p>
                       <a:pPr algn="l"/>
                       <a:r>
-                        <a:rPr sz="1100" b="0" i="0">
+                        <a:rPr sz="1400" b="0" i="0">
                           <a:solidFill>
                             <a:srgbClr val="1A1A1A"/>
                           </a:solidFill>
+                          <a:latin typeface="Meiryo UI"/>
                         </a:rPr>
                         <a:t>2,040</a:t>
                       </a:r>
@@ -9359,10 +9530,11 @@
                     <a:p>
                       <a:pPr algn="l"/>
                       <a:r>
-                        <a:rPr sz="1100" b="0" i="0">
+                        <a:rPr sz="1400" b="0" i="0">
                           <a:solidFill>
                             <a:srgbClr val="1A1A1A"/>
                           </a:solidFill>
+                          <a:latin typeface="Meiryo UI"/>
                         </a:rPr>
                         <a:t>2,700</a:t>
                       </a:r>
@@ -9383,10 +9555,11 @@
                     <a:p>
                       <a:pPr algn="l"/>
                       <a:r>
-                        <a:rPr sz="1100" b="0" i="0">
+                        <a:rPr sz="1400" b="0" i="0">
                           <a:solidFill>
                             <a:srgbClr val="1A1A1A"/>
                           </a:solidFill>
+                          <a:latin typeface="Meiryo UI"/>
                         </a:rPr>
                         <a:t>チャーンレート</a:t>
                       </a:r>
@@ -9405,10 +9578,11 @@
                     <a:p>
                       <a:pPr algn="l"/>
                       <a:r>
-                        <a:rPr sz="1100" b="0" i="0">
+                        <a:rPr sz="1400" b="0" i="0">
                           <a:solidFill>
                             <a:srgbClr val="1A1A1A"/>
                           </a:solidFill>
+                          <a:latin typeface="Meiryo UI"/>
                         </a:rPr>
                         <a:t>2.1%</a:t>
                       </a:r>
@@ -9427,10 +9601,11 @@
                     <a:p>
                       <a:pPr algn="l"/>
                       <a:r>
-                        <a:rPr sz="1100" b="0" i="0">
+                        <a:rPr sz="1400" b="0" i="0">
                           <a:solidFill>
                             <a:srgbClr val="1A1A1A"/>
                           </a:solidFill>
+                          <a:latin typeface="Meiryo UI"/>
                         </a:rPr>
                         <a:t>1.8%</a:t>
                       </a:r>
@@ -9449,10 +9624,11 @@
                     <a:p>
                       <a:pPr algn="l"/>
                       <a:r>
-                        <a:rPr sz="1100" b="0" i="0">
+                        <a:rPr sz="1400" b="0" i="0">
                           <a:solidFill>
                             <a:srgbClr val="1A1A1A"/>
                           </a:solidFill>
+                          <a:latin typeface="Meiryo UI"/>
                         </a:rPr>
                         <a:t>1.5%</a:t>
                       </a:r>
@@ -9471,10 +9647,11 @@
                     <a:p>
                       <a:pPr algn="l"/>
                       <a:r>
-                        <a:rPr sz="1100" b="0" i="0">
+                        <a:rPr sz="1400" b="0" i="0">
                           <a:solidFill>
                             <a:srgbClr val="1A1A1A"/>
                           </a:solidFill>
+                          <a:latin typeface="Meiryo UI"/>
                         </a:rPr>
                         <a:t>1.2%</a:t>
                       </a:r>
@@ -9495,10 +9672,11 @@
                     <a:p>
                       <a:pPr algn="l"/>
                       <a:r>
-                        <a:rPr sz="1100" b="0" i="0">
+                        <a:rPr sz="1400" b="0" i="0">
                           <a:solidFill>
                             <a:srgbClr val="1A1A1A"/>
                           </a:solidFill>
+                          <a:latin typeface="Meiryo UI"/>
                         </a:rPr>
                         <a:t>NPS</a:t>
                       </a:r>
@@ -9517,10 +9695,11 @@
                     <a:p>
                       <a:pPr algn="l"/>
                       <a:r>
-                        <a:rPr sz="1100" b="0" i="0">
+                        <a:rPr sz="1400" b="0" i="0">
                           <a:solidFill>
                             <a:srgbClr val="1A1A1A"/>
                           </a:solidFill>
+                          <a:latin typeface="Meiryo UI"/>
                         </a:rPr>
                         <a:t>32</a:t>
                       </a:r>
@@ -9539,10 +9718,11 @@
                     <a:p>
                       <a:pPr algn="l"/>
                       <a:r>
-                        <a:rPr sz="1100" b="0" i="0">
+                        <a:rPr sz="1400" b="0" i="0">
                           <a:solidFill>
                             <a:srgbClr val="1A1A1A"/>
                           </a:solidFill>
+                          <a:latin typeface="Meiryo UI"/>
                         </a:rPr>
                         <a:t>38</a:t>
                       </a:r>
@@ -9561,10 +9741,11 @@
                     <a:p>
                       <a:pPr algn="l"/>
                       <a:r>
-                        <a:rPr sz="1100" b="0" i="0">
+                        <a:rPr sz="1400" b="0" i="0">
                           <a:solidFill>
                             <a:srgbClr val="1A1A1A"/>
                           </a:solidFill>
+                          <a:latin typeface="Meiryo UI"/>
                         </a:rPr>
                         <a:t>45</a:t>
                       </a:r>
@@ -9583,10 +9764,11 @@
                     <a:p>
                       <a:pPr algn="l"/>
                       <a:r>
-                        <a:rPr sz="1100" b="0" i="0">
+                        <a:rPr sz="1400" b="0" i="0">
                           <a:solidFill>
                             <a:srgbClr val="1A1A1A"/>
                           </a:solidFill>
+                          <a:latin typeface="Meiryo UI"/>
                         </a:rPr>
                         <a:t>52</a:t>
                       </a:r>
@@ -9619,8 +9801,8 @@
         </p:blipFill>
         <p:spPr>
           <a:xfrm>
-            <a:off x="10040112" y="73152"/>
-            <a:ext cx="2011680" cy="625706"/>
+            <a:off x="9338767" y="83210"/>
+            <a:ext cx="2016252" cy="468172"/>
           </a:xfrm>
           <a:prstGeom prst="rect">
             <a:avLst/>
@@ -9635,14 +9817,14 @@
         </p:nvSpPr>
         <p:spPr>
           <a:xfrm>
-            <a:off x="0" y="6473952"/>
-            <a:ext cx="12188952" cy="15240"/>
+            <a:off x="838504" y="6355994"/>
+            <a:ext cx="10515600" cy="19050"/>
           </a:xfrm>
           <a:prstGeom prst="rect">
             <a:avLst/>
           </a:prstGeom>
           <a:solidFill>
-            <a:srgbClr val="000000"/>
+            <a:srgbClr val="1A1A1A"/>
           </a:solidFill>
           <a:ln>
             <a:noFill/>
@@ -9679,8 +9861,8 @@
         </p:nvSpPr>
         <p:spPr>
           <a:xfrm>
-            <a:off x="457200" y="6512052"/>
-            <a:ext cx="7315200" cy="320040"/>
+            <a:off x="838504" y="6400800"/>
+            <a:ext cx="6400800" cy="228600"/>
           </a:xfrm>
           <a:prstGeom prst="rect">
             <a:avLst/>
@@ -9694,12 +9876,13 @@
           <a:lstStyle/>
           <a:p>
             <a:r>
-              <a:rPr sz="800" b="0" i="0">
-                <a:solidFill>
-                  <a:srgbClr val="808080"/>
-                </a:solidFill>
-              </a:rPr>
-              <a:t>Confidential All Rights Reserved SALESCORE Inc.</a:t>
+              <a:rPr sz="900" b="0" i="0">
+                <a:solidFill>
+                  <a:srgbClr val="888888"/>
+                </a:solidFill>
+                <a:latin typeface="Meiryo UI"/>
+              </a:rPr>
+              <a:t>Confidential All Rights Reserved SALESCORE Co., Ltd.</a:t>
             </a:r>
           </a:p>
         </p:txBody>
@@ -9712,8 +9895,8 @@
         </p:nvSpPr>
         <p:spPr>
           <a:xfrm>
-            <a:off x="11640312" y="6512052"/>
-            <a:ext cx="411480" cy="320040"/>
+            <a:off x="10515600" y="6400800"/>
+            <a:ext cx="1371600" cy="228600"/>
           </a:xfrm>
           <a:prstGeom prst="rect">
             <a:avLst/>
@@ -9728,10 +9911,11 @@
           <a:p>
             <a:pPr algn="r"/>
             <a:r>
-              <a:rPr sz="900" b="0" i="0">
-                <a:solidFill>
-                  <a:srgbClr val="808080"/>
-                </a:solidFill>
+              <a:rPr sz="1200" b="0" i="0">
+                <a:solidFill>
+                  <a:srgbClr val="888888"/>
+                </a:solidFill>
+                <a:latin typeface="Meiryo UI"/>
               </a:rPr>
               <a:t>4</a:t>
             </a:r>
@@ -9827,6 +10011,7 @@
                 <a:solidFill>
                   <a:srgbClr val="FFFFFF"/>
                 </a:solidFill>
+                <a:latin typeface="Meiryo UI"/>
               </a:rPr>
               <a:t>2. 市場分析</a:t>
             </a:r>
@@ -9893,8 +10078,8 @@
         </p:blipFill>
         <p:spPr>
           <a:xfrm>
-            <a:off x="10040112" y="73152"/>
-            <a:ext cx="2011680" cy="625706"/>
+            <a:off x="9338767" y="83210"/>
+            <a:ext cx="2016252" cy="468172"/>
           </a:xfrm>
           <a:prstGeom prst="rect">
             <a:avLst/>
@@ -9909,14 +10094,14 @@
         </p:nvSpPr>
         <p:spPr>
           <a:xfrm>
-            <a:off x="0" y="6473952"/>
-            <a:ext cx="12188952" cy="15240"/>
+            <a:off x="838504" y="6355994"/>
+            <a:ext cx="10515600" cy="19050"/>
           </a:xfrm>
           <a:prstGeom prst="rect">
             <a:avLst/>
           </a:prstGeom>
           <a:solidFill>
-            <a:srgbClr val="000000"/>
+            <a:srgbClr val="1A1A1A"/>
           </a:solidFill>
           <a:ln>
             <a:noFill/>
@@ -9953,8 +10138,8 @@
         </p:nvSpPr>
         <p:spPr>
           <a:xfrm>
-            <a:off x="457200" y="6512052"/>
-            <a:ext cx="7315200" cy="320040"/>
+            <a:off x="838504" y="6400800"/>
+            <a:ext cx="6400800" cy="228600"/>
           </a:xfrm>
           <a:prstGeom prst="rect">
             <a:avLst/>
@@ -9968,12 +10153,13 @@
           <a:lstStyle/>
           <a:p>
             <a:r>
-              <a:rPr sz="800" b="0" i="0">
-                <a:solidFill>
-                  <a:srgbClr val="808080"/>
-                </a:solidFill>
-              </a:rPr>
-              <a:t>Confidential All Rights Reserved SALESCORE Inc.</a:t>
+              <a:rPr sz="900" b="0" i="0">
+                <a:solidFill>
+                  <a:srgbClr val="888888"/>
+                </a:solidFill>
+                <a:latin typeface="Meiryo UI"/>
+              </a:rPr>
+              <a:t>Confidential All Rights Reserved SALESCORE Co., Ltd.</a:t>
             </a:r>
           </a:p>
         </p:txBody>
@@ -9986,8 +10172,8 @@
         </p:nvSpPr>
         <p:spPr>
           <a:xfrm>
-            <a:off x="11640312" y="6512052"/>
-            <a:ext cx="411480" cy="320040"/>
+            <a:off x="10515600" y="6400800"/>
+            <a:ext cx="1371600" cy="228600"/>
           </a:xfrm>
           <a:prstGeom prst="rect">
             <a:avLst/>
@@ -10002,10 +10188,11 @@
           <a:p>
             <a:pPr algn="r"/>
             <a:r>
-              <a:rPr sz="900" b="0" i="0">
-                <a:solidFill>
-                  <a:srgbClr val="808080"/>
-                </a:solidFill>
+              <a:rPr sz="1200" b="0" i="0">
+                <a:solidFill>
+                  <a:srgbClr val="888888"/>
+                </a:solidFill>
+                <a:latin typeface="Meiryo UI"/>
               </a:rPr>
               <a:t>5</a:t>
             </a:r>
@@ -10082,8 +10269,8 @@
         </p:nvSpPr>
         <p:spPr>
           <a:xfrm>
-            <a:off x="457200" y="64008"/>
-            <a:ext cx="9491472" cy="219456"/>
+            <a:off x="828446" y="64008"/>
+            <a:ext cx="8686800" cy="182880"/>
           </a:xfrm>
           <a:prstGeom prst="rect">
             <a:avLst/>
@@ -10099,8 +10286,9 @@
             <a:r>
               <a:rPr sz="900" b="1" i="0">
                 <a:solidFill>
-                  <a:srgbClr val="55657A"/>
-                </a:solidFill>
+                  <a:srgbClr val="888888"/>
+                </a:solidFill>
+                <a:latin typeface="Meiryo UI"/>
               </a:rPr>
               <a:t>2.1</a:t>
             </a:r>
@@ -10115,8 +10303,8 @@
         </p:nvSpPr>
         <p:spPr>
           <a:xfrm>
-            <a:off x="457200" y="246888"/>
-            <a:ext cx="9491472" cy="566928"/>
+            <a:off x="828446" y="252374"/>
+            <a:ext cx="8686800" cy="288036"/>
           </a:xfrm>
           <a:prstGeom prst="rect">
             <a:avLst/>
@@ -10130,10 +10318,11 @@
           <a:lstStyle/>
           <a:p>
             <a:r>
-              <a:rPr sz="2600" b="1" i="0">
+              <a:rPr sz="2100" b="1" i="0">
                 <a:solidFill>
                   <a:srgbClr val="1A1A1A"/>
                 </a:solidFill>
+                <a:latin typeface="Meiryo UI"/>
               </a:rPr>
               <a:t>市場環境と競合状況</a:t>
             </a:r>
@@ -10148,14 +10337,14 @@
         </p:nvSpPr>
         <p:spPr>
           <a:xfrm>
-            <a:off x="0" y="758952"/>
-            <a:ext cx="12188952" cy="22860"/>
+            <a:off x="838504" y="630021"/>
+            <a:ext cx="10515600" cy="19050"/>
           </a:xfrm>
           <a:prstGeom prst="rect">
             <a:avLst/>
           </a:prstGeom>
           <a:solidFill>
-            <a:srgbClr val="000000"/>
+            <a:srgbClr val="1A1A1A"/>
           </a:solidFill>
           <a:ln>
             <a:noFill/>
@@ -10192,8 +10381,8 @@
         </p:nvSpPr>
         <p:spPr>
           <a:xfrm>
-            <a:off x="457200" y="923544"/>
-            <a:ext cx="11411712" cy="548640"/>
+            <a:off x="838504" y="640080"/>
+            <a:ext cx="10515600" cy="629107"/>
           </a:xfrm>
           <a:prstGeom prst="rect">
             <a:avLst/>
@@ -10207,10 +10396,11 @@
           <a:lstStyle/>
           <a:p>
             <a:r>
-              <a:rPr sz="1200" b="0" i="0">
+              <a:rPr sz="1800" b="0" i="0">
                 <a:solidFill>
                   <a:srgbClr val="1A1A1A"/>
                 </a:solidFill>
+                <a:latin typeface="Meiryo UI"/>
               </a:rPr>
               <a:t>SaaS市場は急速に拡大しており、差別化が競争優位の鍵です。</a:t>
             </a:r>
@@ -10225,8 +10415,8 @@
         </p:nvSpPr>
         <p:spPr>
           <a:xfrm>
-            <a:off x="457200" y="1517904"/>
-            <a:ext cx="5545836" cy="320040"/>
+            <a:off x="838504" y="1280160"/>
+            <a:ext cx="5097780" cy="320040"/>
           </a:xfrm>
           <a:prstGeom prst="rect">
             <a:avLst/>
@@ -10240,10 +10430,11 @@
           <a:lstStyle/>
           <a:p>
             <a:r>
-              <a:rPr sz="1300" b="1" i="0">
+              <a:rPr sz="1400" b="1" i="0">
                 <a:solidFill>
                   <a:srgbClr val="1D3461"/>
                 </a:solidFill>
+                <a:latin typeface="Meiryo UI"/>
               </a:rPr>
               <a:t>機会（Opportunities）</a:t>
             </a:r>
@@ -10258,8 +10449,8 @@
         </p:nvSpPr>
         <p:spPr>
           <a:xfrm>
-            <a:off x="6323076" y="1517904"/>
-            <a:ext cx="5545836" cy="320040"/>
+            <a:off x="6256324" y="1280160"/>
+            <a:ext cx="5097780" cy="320040"/>
           </a:xfrm>
           <a:prstGeom prst="rect">
             <a:avLst/>
@@ -10273,10 +10464,11 @@
           <a:lstStyle/>
           <a:p>
             <a:r>
-              <a:rPr sz="1300" b="1" i="0">
+              <a:rPr sz="1400" b="1" i="0">
                 <a:solidFill>
                   <a:srgbClr val="1D3461"/>
                 </a:solidFill>
+                <a:latin typeface="Meiryo UI"/>
               </a:rPr>
               <a:t>脅威（Threats）</a:t>
             </a:r>
@@ -10291,8 +10483,8 @@
         </p:nvSpPr>
         <p:spPr>
           <a:xfrm>
-            <a:off x="6156706" y="1517904"/>
-            <a:ext cx="12700" cy="4864608"/>
+            <a:off x="6089954" y="1280160"/>
+            <a:ext cx="12700" cy="4984394"/>
           </a:xfrm>
           <a:prstGeom prst="rect">
             <a:avLst/>
@@ -10335,8 +10527,8 @@
         </p:nvSpPr>
         <p:spPr>
           <a:xfrm>
-            <a:off x="457200" y="1865376"/>
-            <a:ext cx="5545836" cy="4517136"/>
+            <a:off x="838504" y="1627632"/>
+            <a:ext cx="5097780" cy="4636922"/>
           </a:xfrm>
           <a:prstGeom prst="rect">
             <a:avLst/>
@@ -10358,18 +10550,20 @@
               </a:spcAft>
             </a:pPr>
             <a:r>
-              <a:rPr sz="1200" b="0" i="0">
-                <a:solidFill>
-                  <a:srgbClr val="1B4FA8"/>
-                </a:solidFill>
-              </a:rPr>
-              <a:t>• </a:t>
-            </a:r>
-            <a:r>
-              <a:rPr sz="1300" b="0" i="0">
+              <a:rPr sz="1600" b="0" i="0">
+                <a:solidFill>
+                  <a:srgbClr val="0066CD"/>
+                </a:solidFill>
+                <a:latin typeface="Meiryo UI"/>
+              </a:rPr>
+              <a:t>● </a:t>
+            </a:r>
+            <a:r>
+              <a:rPr sz="1600" b="0" i="0">
                 <a:solidFill>
                   <a:srgbClr val="1A1A1A"/>
                 </a:solidFill>
+                <a:latin typeface="Meiryo UI"/>
               </a:rPr>
               <a:t>クラウド移行需要の増加</a:t>
             </a:r>
@@ -10384,18 +10578,20 @@
               </a:spcAft>
             </a:pPr>
             <a:r>
-              <a:rPr sz="1200" b="0" i="0">
-                <a:solidFill>
-                  <a:srgbClr val="1B4FA8"/>
-                </a:solidFill>
-              </a:rPr>
-              <a:t>• </a:t>
-            </a:r>
-            <a:r>
-              <a:rPr sz="1300" b="0" i="0">
+              <a:rPr sz="1600" b="0" i="0">
+                <a:solidFill>
+                  <a:srgbClr val="0066CD"/>
+                </a:solidFill>
+                <a:latin typeface="Meiryo UI"/>
+              </a:rPr>
+              <a:t>● </a:t>
+            </a:r>
+            <a:r>
+              <a:rPr sz="1600" b="0" i="0">
                 <a:solidFill>
                   <a:srgbClr val="1A1A1A"/>
                 </a:solidFill>
+                <a:latin typeface="Meiryo UI"/>
               </a:rPr>
               <a:t>SMB市場の未開拓ポテンシャル</a:t>
             </a:r>
@@ -10410,18 +10606,20 @@
               </a:spcAft>
             </a:pPr>
             <a:r>
-              <a:rPr sz="1200" b="0" i="0">
-                <a:solidFill>
-                  <a:srgbClr val="1B4FA8"/>
-                </a:solidFill>
-              </a:rPr>
-              <a:t>• </a:t>
-            </a:r>
-            <a:r>
-              <a:rPr sz="1300" b="0" i="0">
+              <a:rPr sz="1600" b="0" i="0">
+                <a:solidFill>
+                  <a:srgbClr val="0066CD"/>
+                </a:solidFill>
+                <a:latin typeface="Meiryo UI"/>
+              </a:rPr>
+              <a:t>● </a:t>
+            </a:r>
+            <a:r>
+              <a:rPr sz="1600" b="0" i="0">
                 <a:solidFill>
                   <a:srgbClr val="1A1A1A"/>
                 </a:solidFill>
+                <a:latin typeface="Meiryo UI"/>
               </a:rPr>
               <a:t>パートナーエコシステムの拡充</a:t>
             </a:r>
@@ -10436,18 +10634,20 @@
               </a:spcAft>
             </a:pPr>
             <a:r>
-              <a:rPr sz="1000" b="0" i="0">
-                <a:solidFill>
-                  <a:srgbClr val="808080"/>
-                </a:solidFill>
+              <a:rPr sz="1400" b="0" i="0">
+                <a:solidFill>
+                  <a:srgbClr val="888888"/>
+                </a:solidFill>
+                <a:latin typeface="Meiryo UI"/>
               </a:rPr>
               <a:t>      – </a:t>
             </a:r>
             <a:r>
-              <a:rPr sz="1100" b="0" i="0">
+              <a:rPr sz="1400" b="0" i="0">
                 <a:solidFill>
                   <a:srgbClr val="1A1A1A"/>
                 </a:solidFill>
+                <a:latin typeface="Meiryo UI"/>
               </a:rPr>
               <a:t>ISVパートナー: 15社</a:t>
             </a:r>
@@ -10462,18 +10662,20 @@
               </a:spcAft>
             </a:pPr>
             <a:r>
-              <a:rPr sz="1000" b="0" i="0">
-                <a:solidFill>
-                  <a:srgbClr val="808080"/>
-                </a:solidFill>
+              <a:rPr sz="1400" b="0" i="0">
+                <a:solidFill>
+                  <a:srgbClr val="888888"/>
+                </a:solidFill>
+                <a:latin typeface="Meiryo UI"/>
               </a:rPr>
               <a:t>      – </a:t>
             </a:r>
             <a:r>
-              <a:rPr sz="1100" b="0" i="0">
+              <a:rPr sz="1400" b="0" i="0">
                 <a:solidFill>
                   <a:srgbClr val="1A1A1A"/>
                 </a:solidFill>
+                <a:latin typeface="Meiryo UI"/>
               </a:rPr>
               <a:t>リセラー: 40社</a:t>
             </a:r>
@@ -10488,8 +10690,8 @@
         </p:nvSpPr>
         <p:spPr>
           <a:xfrm>
-            <a:off x="6323076" y="1865376"/>
-            <a:ext cx="5545836" cy="4517136"/>
+            <a:off x="6256324" y="1627632"/>
+            <a:ext cx="5097780" cy="4636922"/>
           </a:xfrm>
           <a:prstGeom prst="rect">
             <a:avLst/>
@@ -10511,18 +10713,20 @@
               </a:spcAft>
             </a:pPr>
             <a:r>
-              <a:rPr sz="1200" b="0" i="0">
-                <a:solidFill>
-                  <a:srgbClr val="1B4FA8"/>
-                </a:solidFill>
-              </a:rPr>
-              <a:t>• </a:t>
-            </a:r>
-            <a:r>
-              <a:rPr sz="1300" b="0" i="0">
+              <a:rPr sz="1600" b="0" i="0">
+                <a:solidFill>
+                  <a:srgbClr val="0066CD"/>
+                </a:solidFill>
+                <a:latin typeface="Meiryo UI"/>
+              </a:rPr>
+              <a:t>● </a:t>
+            </a:r>
+            <a:r>
+              <a:rPr sz="1600" b="0" i="0">
                 <a:solidFill>
                   <a:srgbClr val="1A1A1A"/>
                 </a:solidFill>
+                <a:latin typeface="Meiryo UI"/>
               </a:rPr>
               <a:t>競合の価格競争激化</a:t>
             </a:r>
@@ -10537,18 +10741,20 @@
               </a:spcAft>
             </a:pPr>
             <a:r>
-              <a:rPr sz="1200" b="0" i="0">
-                <a:solidFill>
-                  <a:srgbClr val="1B4FA8"/>
-                </a:solidFill>
-              </a:rPr>
-              <a:t>• </a:t>
-            </a:r>
-            <a:r>
-              <a:rPr sz="1300" b="0" i="0">
+              <a:rPr sz="1600" b="0" i="0">
+                <a:solidFill>
+                  <a:srgbClr val="0066CD"/>
+                </a:solidFill>
+                <a:latin typeface="Meiryo UI"/>
+              </a:rPr>
+              <a:t>● </a:t>
+            </a:r>
+            <a:r>
+              <a:rPr sz="1600" b="0" i="0">
                 <a:solidFill>
                   <a:srgbClr val="1A1A1A"/>
                 </a:solidFill>
+                <a:latin typeface="Meiryo UI"/>
               </a:rPr>
               <a:t>顧客の意思決定長期化</a:t>
             </a:r>
@@ -10563,18 +10769,20 @@
               </a:spcAft>
             </a:pPr>
             <a:r>
-              <a:rPr sz="1200" b="0" i="0">
-                <a:solidFill>
-                  <a:srgbClr val="1B4FA8"/>
-                </a:solidFill>
-              </a:rPr>
-              <a:t>• </a:t>
-            </a:r>
-            <a:r>
-              <a:rPr sz="1300" b="0" i="0">
+              <a:rPr sz="1600" b="0" i="0">
+                <a:solidFill>
+                  <a:srgbClr val="0066CD"/>
+                </a:solidFill>
+                <a:latin typeface="Meiryo UI"/>
+              </a:rPr>
+              <a:t>● </a:t>
+            </a:r>
+            <a:r>
+              <a:rPr sz="1600" b="0" i="0">
                 <a:solidFill>
                   <a:srgbClr val="1A1A1A"/>
                 </a:solidFill>
+                <a:latin typeface="Meiryo UI"/>
               </a:rPr>
               <a:t>景気不透明感による予算削減</a:t>
             </a:r>
@@ -10589,18 +10797,20 @@
               </a:spcAft>
             </a:pPr>
             <a:r>
-              <a:rPr sz="1000" b="0" i="0">
-                <a:solidFill>
-                  <a:srgbClr val="808080"/>
-                </a:solidFill>
+              <a:rPr sz="1400" b="0" i="0">
+                <a:solidFill>
+                  <a:srgbClr val="888888"/>
+                </a:solidFill>
+                <a:latin typeface="Meiryo UI"/>
               </a:rPr>
               <a:t>      – </a:t>
             </a:r>
             <a:r>
-              <a:rPr sz="1100" b="0" i="0">
+              <a:rPr sz="1400" b="0" i="0">
                 <a:solidFill>
                   <a:srgbClr val="1A1A1A"/>
                 </a:solidFill>
+                <a:latin typeface="Meiryo UI"/>
               </a:rPr>
               <a:t>IT予算凍結企業: 約18%</a:t>
             </a:r>
@@ -10615,18 +10825,20 @@
               </a:spcAft>
             </a:pPr>
             <a:r>
-              <a:rPr sz="1000" b="0" i="0">
-                <a:solidFill>
-                  <a:srgbClr val="808080"/>
-                </a:solidFill>
+              <a:rPr sz="1400" b="0" i="0">
+                <a:solidFill>
+                  <a:srgbClr val="888888"/>
+                </a:solidFill>
+                <a:latin typeface="Meiryo UI"/>
               </a:rPr>
               <a:t>      – </a:t>
             </a:r>
             <a:r>
-              <a:rPr sz="1100" b="0" i="0">
+              <a:rPr sz="1400" b="0" i="0">
                 <a:solidFill>
                   <a:srgbClr val="1A1A1A"/>
                 </a:solidFill>
+                <a:latin typeface="Meiryo UI"/>
               </a:rPr>
               <a:t>延期案件: 前年比+22%</a:t>
             </a:r>
@@ -10649,8 +10861,8 @@
         </p:blipFill>
         <p:spPr>
           <a:xfrm>
-            <a:off x="10040112" y="73152"/>
-            <a:ext cx="2011680" cy="625706"/>
+            <a:off x="9338767" y="83210"/>
+            <a:ext cx="2016252" cy="468172"/>
           </a:xfrm>
           <a:prstGeom prst="rect">
             <a:avLst/>
@@ -10665,14 +10877,14 @@
         </p:nvSpPr>
         <p:spPr>
           <a:xfrm>
-            <a:off x="0" y="6473952"/>
-            <a:ext cx="12188952" cy="15240"/>
+            <a:off x="838504" y="6355994"/>
+            <a:ext cx="10515600" cy="19050"/>
           </a:xfrm>
           <a:prstGeom prst="rect">
             <a:avLst/>
           </a:prstGeom>
           <a:solidFill>
-            <a:srgbClr val="000000"/>
+            <a:srgbClr val="1A1A1A"/>
           </a:solidFill>
           <a:ln>
             <a:noFill/>
@@ -10709,8 +10921,8 @@
         </p:nvSpPr>
         <p:spPr>
           <a:xfrm>
-            <a:off x="457200" y="6512052"/>
-            <a:ext cx="7315200" cy="320040"/>
+            <a:off x="838504" y="6400800"/>
+            <a:ext cx="6400800" cy="228600"/>
           </a:xfrm>
           <a:prstGeom prst="rect">
             <a:avLst/>
@@ -10724,12 +10936,13 @@
           <a:lstStyle/>
           <a:p>
             <a:r>
-              <a:rPr sz="800" b="0" i="0">
-                <a:solidFill>
-                  <a:srgbClr val="808080"/>
-                </a:solidFill>
-              </a:rPr>
-              <a:t>Confidential All Rights Reserved SALESCORE Inc.</a:t>
+              <a:rPr sz="900" b="0" i="0">
+                <a:solidFill>
+                  <a:srgbClr val="888888"/>
+                </a:solidFill>
+                <a:latin typeface="Meiryo UI"/>
+              </a:rPr>
+              <a:t>Confidential All Rights Reserved SALESCORE Co., Ltd.</a:t>
             </a:r>
           </a:p>
         </p:txBody>
@@ -10742,8 +10955,8 @@
         </p:nvSpPr>
         <p:spPr>
           <a:xfrm>
-            <a:off x="11640312" y="6512052"/>
-            <a:ext cx="411480" cy="320040"/>
+            <a:off x="10515600" y="6400800"/>
+            <a:ext cx="1371600" cy="228600"/>
           </a:xfrm>
           <a:prstGeom prst="rect">
             <a:avLst/>
@@ -10758,10 +10971,11 @@
           <a:p>
             <a:pPr algn="r"/>
             <a:r>
-              <a:rPr sz="900" b="0" i="0">
-                <a:solidFill>
-                  <a:srgbClr val="808080"/>
-                </a:solidFill>
+              <a:rPr sz="1200" b="0" i="0">
+                <a:solidFill>
+                  <a:srgbClr val="888888"/>
+                </a:solidFill>
+                <a:latin typeface="Meiryo UI"/>
               </a:rPr>
               <a:t>6</a:t>
             </a:r>
@@ -10838,8 +11052,8 @@
         </p:nvSpPr>
         <p:spPr>
           <a:xfrm>
-            <a:off x="457200" y="64008"/>
-            <a:ext cx="9491472" cy="219456"/>
+            <a:off x="828446" y="64008"/>
+            <a:ext cx="8686800" cy="182880"/>
           </a:xfrm>
           <a:prstGeom prst="rect">
             <a:avLst/>
@@ -10855,8 +11069,9 @@
             <a:r>
               <a:rPr sz="900" b="1" i="0">
                 <a:solidFill>
-                  <a:srgbClr val="55657A"/>
-                </a:solidFill>
+                  <a:srgbClr val="888888"/>
+                </a:solidFill>
+                <a:latin typeface="Meiryo UI"/>
               </a:rPr>
               <a:t>2.2</a:t>
             </a:r>
@@ -10871,8 +11086,8 @@
         </p:nvSpPr>
         <p:spPr>
           <a:xfrm>
-            <a:off x="457200" y="246888"/>
-            <a:ext cx="9491472" cy="566928"/>
+            <a:off x="828446" y="252374"/>
+            <a:ext cx="8686800" cy="288036"/>
           </a:xfrm>
           <a:prstGeom prst="rect">
             <a:avLst/>
@@ -10886,10 +11101,11 @@
           <a:lstStyle/>
           <a:p>
             <a:r>
-              <a:rPr sz="2600" b="1" i="0">
+              <a:rPr sz="2100" b="1" i="0">
                 <a:solidFill>
                   <a:srgbClr val="1A1A1A"/>
                 </a:solidFill>
+                <a:latin typeface="Meiryo UI"/>
               </a:rPr>
               <a:t>顧客セグメント別分析</a:t>
             </a:r>
@@ -10904,14 +11120,14 @@
         </p:nvSpPr>
         <p:spPr>
           <a:xfrm>
-            <a:off x="0" y="758952"/>
-            <a:ext cx="12188952" cy="22860"/>
+            <a:off x="838504" y="630021"/>
+            <a:ext cx="10515600" cy="19050"/>
           </a:xfrm>
           <a:prstGeom prst="rect">
             <a:avLst/>
           </a:prstGeom>
           <a:solidFill>
-            <a:srgbClr val="000000"/>
+            <a:srgbClr val="1A1A1A"/>
           </a:solidFill>
           <a:ln>
             <a:noFill/>
@@ -10948,8 +11164,8 @@
         </p:nvSpPr>
         <p:spPr>
           <a:xfrm>
-            <a:off x="457200" y="923544"/>
-            <a:ext cx="11411712" cy="548640"/>
+            <a:off x="838504" y="640080"/>
+            <a:ext cx="10515600" cy="629107"/>
           </a:xfrm>
           <a:prstGeom prst="rect">
             <a:avLst/>
@@ -10963,10 +11179,11 @@
           <a:lstStyle/>
           <a:p>
             <a:r>
-              <a:rPr sz="1200" b="0" i="0">
+              <a:rPr sz="1800" b="0" i="0">
                 <a:solidFill>
                   <a:srgbClr val="1A1A1A"/>
                 </a:solidFill>
+                <a:latin typeface="Meiryo UI"/>
               </a:rPr>
               <a:t>ターゲットセグメントごとの攻略優先度を整理しました。</a:t>
             </a:r>
@@ -10982,8 +11199,8 @@
           <p:nvPr/>
         </p:nvGraphicFramePr>
         <p:xfrm>
-          <a:off x="457200" y="1517904"/>
-          <a:ext cx="11411710" cy="1645920"/>
+          <a:off x="838504" y="1280160"/>
+          <a:ext cx="10515600" cy="1645920"/>
         </p:xfrm>
         <a:graphic>
           <a:graphicData uri="http://schemas.openxmlformats.org/drawingml/2006/table">
@@ -10992,11 +11209,11 @@
                 <a:tableStyleId>{5C22544A-7EE6-4342-B048-85BDC9FD1C3A}</a:tableStyleId>
               </a:tblPr>
               <a:tblGrid>
-                <a:gridCol w="2282342"/>
-                <a:gridCol w="2282342"/>
-                <a:gridCol w="2282342"/>
-                <a:gridCol w="2282342"/>
-                <a:gridCol w="2282342"/>
+                <a:gridCol w="2103120"/>
+                <a:gridCol w="2103120"/>
+                <a:gridCol w="2103120"/>
+                <a:gridCol w="2103120"/>
+                <a:gridCol w="2103120"/>
               </a:tblGrid>
               <a:tr h="365760">
                 <a:tc>
@@ -11006,10 +11223,11 @@
                     <a:p>
                       <a:pPr algn="ctr"/>
                       <a:r>
-                        <a:rPr sz="1100" b="1" i="0">
+                        <a:rPr sz="1400" b="1" i="0">
                           <a:solidFill>
                             <a:srgbClr val="FFFFFF"/>
                           </a:solidFill>
+                          <a:latin typeface="Meiryo UI"/>
                         </a:rPr>
                         <a:t>セグメント</a:t>
                       </a:r>
@@ -11028,10 +11246,11 @@
                     <a:p>
                       <a:pPr algn="ctr"/>
                       <a:r>
-                        <a:rPr sz="1100" b="1" i="0">
+                        <a:rPr sz="1400" b="1" i="0">
                           <a:solidFill>
                             <a:srgbClr val="FFFFFF"/>
                           </a:solidFill>
+                          <a:latin typeface="Meiryo UI"/>
                         </a:rPr>
                         <a:t>社員数</a:t>
                       </a:r>
@@ -11050,10 +11269,11 @@
                     <a:p>
                       <a:pPr algn="ctr"/>
                       <a:r>
-                        <a:rPr sz="1100" b="1" i="0">
+                        <a:rPr sz="1400" b="1" i="0">
                           <a:solidFill>
                             <a:srgbClr val="FFFFFF"/>
                           </a:solidFill>
+                          <a:latin typeface="Meiryo UI"/>
                         </a:rPr>
                         <a:t>平均契約額</a:t>
                       </a:r>
@@ -11072,10 +11292,11 @@
                     <a:p>
                       <a:pPr algn="ctr"/>
                       <a:r>
-                        <a:rPr sz="1100" b="1" i="0">
+                        <a:rPr sz="1400" b="1" i="0">
                           <a:solidFill>
                             <a:srgbClr val="FFFFFF"/>
                           </a:solidFill>
+                          <a:latin typeface="Meiryo UI"/>
                         </a:rPr>
                         <a:t>勝率</a:t>
                       </a:r>
@@ -11094,10 +11315,11 @@
                     <a:p>
                       <a:pPr algn="ctr"/>
                       <a:r>
-                        <a:rPr sz="1100" b="1" i="0">
+                        <a:rPr sz="1400" b="1" i="0">
                           <a:solidFill>
                             <a:srgbClr val="FFFFFF"/>
                           </a:solidFill>
+                          <a:latin typeface="Meiryo UI"/>
                         </a:rPr>
                         <a:t>優先度</a:t>
                       </a:r>
@@ -11118,10 +11340,11 @@
                     <a:p>
                       <a:pPr algn="l"/>
                       <a:r>
-                        <a:rPr sz="1100" b="0" i="0">
+                        <a:rPr sz="1400" b="0" i="0">
                           <a:solidFill>
                             <a:srgbClr val="1A1A1A"/>
                           </a:solidFill>
+                          <a:latin typeface="Meiryo UI"/>
                         </a:rPr>
                         <a:t>エンタープライズ</a:t>
                       </a:r>
@@ -11140,10 +11363,11 @@
                     <a:p>
                       <a:pPr algn="l"/>
                       <a:r>
-                        <a:rPr sz="1100" b="0" i="0">
+                        <a:rPr sz="1400" b="0" i="0">
                           <a:solidFill>
                             <a:srgbClr val="1A1A1A"/>
                           </a:solidFill>
+                          <a:latin typeface="Meiryo UI"/>
                         </a:rPr>
                         <a:t>1,000名以上</a:t>
                       </a:r>
@@ -11162,10 +11386,11 @@
                     <a:p>
                       <a:pPr algn="l"/>
                       <a:r>
-                        <a:rPr sz="1100" b="0" i="0">
+                        <a:rPr sz="1400" b="0" i="0">
                           <a:solidFill>
                             <a:srgbClr val="1A1A1A"/>
                           </a:solidFill>
+                          <a:latin typeface="Meiryo UI"/>
                         </a:rPr>
                         <a:t>480万円</a:t>
                       </a:r>
@@ -11184,10 +11409,11 @@
                     <a:p>
                       <a:pPr algn="l"/>
                       <a:r>
-                        <a:rPr sz="1100" b="0" i="0">
+                        <a:rPr sz="1400" b="0" i="0">
                           <a:solidFill>
                             <a:srgbClr val="1A1A1A"/>
                           </a:solidFill>
+                          <a:latin typeface="Meiryo UI"/>
                         </a:rPr>
                         <a:t>28%</a:t>
                       </a:r>
@@ -11206,10 +11432,11 @@
                     <a:p>
                       <a:pPr algn="l"/>
                       <a:r>
-                        <a:rPr sz="1100" b="0" i="0">
+                        <a:rPr sz="1400" b="0" i="0">
                           <a:solidFill>
                             <a:srgbClr val="1A1A1A"/>
                           </a:solidFill>
+                          <a:latin typeface="Meiryo UI"/>
                         </a:rPr>
                         <a:t>★★★</a:t>
                       </a:r>
@@ -11230,10 +11457,11 @@
                     <a:p>
                       <a:pPr algn="l"/>
                       <a:r>
-                        <a:rPr sz="1100" b="0" i="0">
+                        <a:rPr sz="1400" b="0" i="0">
                           <a:solidFill>
                             <a:srgbClr val="1A1A1A"/>
                           </a:solidFill>
+                          <a:latin typeface="Meiryo UI"/>
                         </a:rPr>
                         <a:t>中堅企業</a:t>
                       </a:r>
@@ -11252,10 +11480,11 @@
                     <a:p>
                       <a:pPr algn="l"/>
                       <a:r>
-                        <a:rPr sz="1100" b="0" i="0">
+                        <a:rPr sz="1400" b="0" i="0">
                           <a:solidFill>
                             <a:srgbClr val="1A1A1A"/>
                           </a:solidFill>
+                          <a:latin typeface="Meiryo UI"/>
                         </a:rPr>
                         <a:t>300〜999名</a:t>
                       </a:r>
@@ -11274,10 +11503,11 @@
                     <a:p>
                       <a:pPr algn="l"/>
                       <a:r>
-                        <a:rPr sz="1100" b="0" i="0">
+                        <a:rPr sz="1400" b="0" i="0">
                           <a:solidFill>
                             <a:srgbClr val="1A1A1A"/>
                           </a:solidFill>
+                          <a:latin typeface="Meiryo UI"/>
                         </a:rPr>
                         <a:t>180万円</a:t>
                       </a:r>
@@ -11296,10 +11526,11 @@
                     <a:p>
                       <a:pPr algn="l"/>
                       <a:r>
-                        <a:rPr sz="1100" b="0" i="0">
+                        <a:rPr sz="1400" b="0" i="0">
                           <a:solidFill>
                             <a:srgbClr val="1A1A1A"/>
                           </a:solidFill>
+                          <a:latin typeface="Meiryo UI"/>
                         </a:rPr>
                         <a:t>41%</a:t>
                       </a:r>
@@ -11318,10 +11549,11 @@
                     <a:p>
                       <a:pPr algn="l"/>
                       <a:r>
-                        <a:rPr sz="1100" b="0" i="0">
+                        <a:rPr sz="1400" b="0" i="0">
                           <a:solidFill>
                             <a:srgbClr val="1A1A1A"/>
                           </a:solidFill>
+                          <a:latin typeface="Meiryo UI"/>
                         </a:rPr>
                         <a:t>★★★</a:t>
                       </a:r>
@@ -11342,10 +11574,11 @@
                     <a:p>
                       <a:pPr algn="l"/>
                       <a:r>
-                        <a:rPr sz="1100" b="0" i="0">
+                        <a:rPr sz="1400" b="0" i="0">
                           <a:solidFill>
                             <a:srgbClr val="1A1A1A"/>
                           </a:solidFill>
+                          <a:latin typeface="Meiryo UI"/>
                         </a:rPr>
                         <a:t>SMB</a:t>
                       </a:r>
@@ -11364,10 +11597,11 @@
                     <a:p>
                       <a:pPr algn="l"/>
                       <a:r>
-                        <a:rPr sz="1100" b="0" i="0">
+                        <a:rPr sz="1400" b="0" i="0">
                           <a:solidFill>
                             <a:srgbClr val="1A1A1A"/>
                           </a:solidFill>
+                          <a:latin typeface="Meiryo UI"/>
                         </a:rPr>
                         <a:t>50〜299名</a:t>
                       </a:r>
@@ -11386,10 +11620,11 @@
                     <a:p>
                       <a:pPr algn="l"/>
                       <a:r>
-                        <a:rPr sz="1100" b="0" i="0">
+                        <a:rPr sz="1400" b="0" i="0">
                           <a:solidFill>
                             <a:srgbClr val="1A1A1A"/>
                           </a:solidFill>
+                          <a:latin typeface="Meiryo UI"/>
                         </a:rPr>
                         <a:t>60万円</a:t>
                       </a:r>
@@ -11408,10 +11643,11 @@
                     <a:p>
                       <a:pPr algn="l"/>
                       <a:r>
-                        <a:rPr sz="1100" b="0" i="0">
+                        <a:rPr sz="1400" b="0" i="0">
                           <a:solidFill>
                             <a:srgbClr val="1A1A1A"/>
                           </a:solidFill>
+                          <a:latin typeface="Meiryo UI"/>
                         </a:rPr>
                         <a:t>55%</a:t>
                       </a:r>
@@ -11430,10 +11666,11 @@
                     <a:p>
                       <a:pPr algn="l"/>
                       <a:r>
-                        <a:rPr sz="1100" b="0" i="0">
+                        <a:rPr sz="1400" b="0" i="0">
                           <a:solidFill>
                             <a:srgbClr val="1A1A1A"/>
                           </a:solidFill>
+                          <a:latin typeface="Meiryo UI"/>
                         </a:rPr>
                         <a:t>★★</a:t>
                       </a:r>
@@ -11454,10 +11691,11 @@
                     <a:p>
                       <a:pPr algn="l"/>
                       <a:r>
-                        <a:rPr sz="1100" b="0" i="0">
+                        <a:rPr sz="1400" b="0" i="0">
                           <a:solidFill>
                             <a:srgbClr val="1A1A1A"/>
                           </a:solidFill>
+                          <a:latin typeface="Meiryo UI"/>
                         </a:rPr>
                         <a:t>スタートアップ</a:t>
                       </a:r>
@@ -11476,10 +11714,11 @@
                     <a:p>
                       <a:pPr algn="l"/>
                       <a:r>
-                        <a:rPr sz="1100" b="0" i="0">
+                        <a:rPr sz="1400" b="0" i="0">
                           <a:solidFill>
                             <a:srgbClr val="1A1A1A"/>
                           </a:solidFill>
+                          <a:latin typeface="Meiryo UI"/>
                         </a:rPr>
                         <a:t>〜49名</a:t>
                       </a:r>
@@ -11498,10 +11737,11 @@
                     <a:p>
                       <a:pPr algn="l"/>
                       <a:r>
-                        <a:rPr sz="1100" b="0" i="0">
+                        <a:rPr sz="1400" b="0" i="0">
                           <a:solidFill>
                             <a:srgbClr val="1A1A1A"/>
                           </a:solidFill>
+                          <a:latin typeface="Meiryo UI"/>
                         </a:rPr>
                         <a:t>24万円</a:t>
                       </a:r>
@@ -11520,10 +11760,11 @@
                     <a:p>
                       <a:pPr algn="l"/>
                       <a:r>
-                        <a:rPr sz="1100" b="0" i="0">
+                        <a:rPr sz="1400" b="0" i="0">
                           <a:solidFill>
                             <a:srgbClr val="1A1A1A"/>
                           </a:solidFill>
+                          <a:latin typeface="Meiryo UI"/>
                         </a:rPr>
                         <a:t>67%</a:t>
                       </a:r>
@@ -11542,10 +11783,11 @@
                     <a:p>
                       <a:pPr algn="l"/>
                       <a:r>
-                        <a:rPr sz="1100" b="0" i="0">
+                        <a:rPr sz="1400" b="0" i="0">
                           <a:solidFill>
                             <a:srgbClr val="1A1A1A"/>
                           </a:solidFill>
+                          <a:latin typeface="Meiryo UI"/>
                         </a:rPr>
                         <a:t>★</a:t>
                       </a:r>
@@ -11578,8 +11820,8 @@
         </p:blipFill>
         <p:spPr>
           <a:xfrm>
-            <a:off x="10040112" y="73152"/>
-            <a:ext cx="2011680" cy="625706"/>
+            <a:off x="9338767" y="83210"/>
+            <a:ext cx="2016252" cy="468172"/>
           </a:xfrm>
           <a:prstGeom prst="rect">
             <a:avLst/>
@@ -11594,14 +11836,14 @@
         </p:nvSpPr>
         <p:spPr>
           <a:xfrm>
-            <a:off x="0" y="6473952"/>
-            <a:ext cx="12188952" cy="15240"/>
+            <a:off x="838504" y="6355994"/>
+            <a:ext cx="10515600" cy="19050"/>
           </a:xfrm>
           <a:prstGeom prst="rect">
             <a:avLst/>
           </a:prstGeom>
           <a:solidFill>
-            <a:srgbClr val="000000"/>
+            <a:srgbClr val="1A1A1A"/>
           </a:solidFill>
           <a:ln>
             <a:noFill/>
@@ -11638,8 +11880,8 @@
         </p:nvSpPr>
         <p:spPr>
           <a:xfrm>
-            <a:off x="457200" y="6512052"/>
-            <a:ext cx="7315200" cy="320040"/>
+            <a:off x="838504" y="6400800"/>
+            <a:ext cx="6400800" cy="228600"/>
           </a:xfrm>
           <a:prstGeom prst="rect">
             <a:avLst/>
@@ -11653,12 +11895,13 @@
           <a:lstStyle/>
           <a:p>
             <a:r>
-              <a:rPr sz="800" b="0" i="0">
-                <a:solidFill>
-                  <a:srgbClr val="808080"/>
-                </a:solidFill>
-              </a:rPr>
-              <a:t>Confidential All Rights Reserved SALESCORE Inc.</a:t>
+              <a:rPr sz="900" b="0" i="0">
+                <a:solidFill>
+                  <a:srgbClr val="888888"/>
+                </a:solidFill>
+                <a:latin typeface="Meiryo UI"/>
+              </a:rPr>
+              <a:t>Confidential All Rights Reserved SALESCORE Co., Ltd.</a:t>
             </a:r>
           </a:p>
         </p:txBody>
@@ -11671,8 +11914,8 @@
         </p:nvSpPr>
         <p:spPr>
           <a:xfrm>
-            <a:off x="11640312" y="6512052"/>
-            <a:ext cx="411480" cy="320040"/>
+            <a:off x="10515600" y="6400800"/>
+            <a:ext cx="1371600" cy="228600"/>
           </a:xfrm>
           <a:prstGeom prst="rect">
             <a:avLst/>
@@ -11687,10 +11930,11 @@
           <a:p>
             <a:pPr algn="r"/>
             <a:r>
-              <a:rPr sz="900" b="0" i="0">
-                <a:solidFill>
-                  <a:srgbClr val="808080"/>
-                </a:solidFill>
+              <a:rPr sz="1200" b="0" i="0">
+                <a:solidFill>
+                  <a:srgbClr val="888888"/>
+                </a:solidFill>
+                <a:latin typeface="Meiryo UI"/>
               </a:rPr>
               <a:t>7</a:t>
             </a:r>
@@ -11786,6 +12030,7 @@
                 <a:solidFill>
                   <a:srgbClr val="FFFFFF"/>
                 </a:solidFill>
+                <a:latin typeface="Meiryo UI"/>
               </a:rPr>
               <a:t>3. 戦略・施策</a:t>
             </a:r>
@@ -11852,8 +12097,8 @@
         </p:blipFill>
         <p:spPr>
           <a:xfrm>
-            <a:off x="10040112" y="73152"/>
-            <a:ext cx="2011680" cy="625706"/>
+            <a:off x="9338767" y="83210"/>
+            <a:ext cx="2016252" cy="468172"/>
           </a:xfrm>
           <a:prstGeom prst="rect">
             <a:avLst/>
@@ -11868,14 +12113,14 @@
         </p:nvSpPr>
         <p:spPr>
           <a:xfrm>
-            <a:off x="0" y="6473952"/>
-            <a:ext cx="12188952" cy="15240"/>
+            <a:off x="838504" y="6355994"/>
+            <a:ext cx="10515600" cy="19050"/>
           </a:xfrm>
           <a:prstGeom prst="rect">
             <a:avLst/>
           </a:prstGeom>
           <a:solidFill>
-            <a:srgbClr val="000000"/>
+            <a:srgbClr val="1A1A1A"/>
           </a:solidFill>
           <a:ln>
             <a:noFill/>
@@ -11912,8 +12157,8 @@
         </p:nvSpPr>
         <p:spPr>
           <a:xfrm>
-            <a:off x="457200" y="6512052"/>
-            <a:ext cx="7315200" cy="320040"/>
+            <a:off x="838504" y="6400800"/>
+            <a:ext cx="6400800" cy="228600"/>
           </a:xfrm>
           <a:prstGeom prst="rect">
             <a:avLst/>
@@ -11927,12 +12172,13 @@
           <a:lstStyle/>
           <a:p>
             <a:r>
-              <a:rPr sz="800" b="0" i="0">
-                <a:solidFill>
-                  <a:srgbClr val="808080"/>
-                </a:solidFill>
-              </a:rPr>
-              <a:t>Confidential All Rights Reserved SALESCORE Inc.</a:t>
+              <a:rPr sz="900" b="0" i="0">
+                <a:solidFill>
+                  <a:srgbClr val="888888"/>
+                </a:solidFill>
+                <a:latin typeface="Meiryo UI"/>
+              </a:rPr>
+              <a:t>Confidential All Rights Reserved SALESCORE Co., Ltd.</a:t>
             </a:r>
           </a:p>
         </p:txBody>
@@ -11945,8 +12191,8 @@
         </p:nvSpPr>
         <p:spPr>
           <a:xfrm>
-            <a:off x="11640312" y="6512052"/>
-            <a:ext cx="411480" cy="320040"/>
+            <a:off x="10515600" y="6400800"/>
+            <a:ext cx="1371600" cy="228600"/>
           </a:xfrm>
           <a:prstGeom prst="rect">
             <a:avLst/>
@@ -11961,10 +12207,11 @@
           <a:p>
             <a:pPr algn="r"/>
             <a:r>
-              <a:rPr sz="900" b="0" i="0">
-                <a:solidFill>
-                  <a:srgbClr val="808080"/>
-                </a:solidFill>
+              <a:rPr sz="1200" b="0" i="0">
+                <a:solidFill>
+                  <a:srgbClr val="888888"/>
+                </a:solidFill>
+                <a:latin typeface="Meiryo UI"/>
               </a:rPr>
               <a:t>8</a:t>
             </a:r>
@@ -12041,8 +12288,8 @@
         </p:nvSpPr>
         <p:spPr>
           <a:xfrm>
-            <a:off x="457200" y="64008"/>
-            <a:ext cx="9491472" cy="219456"/>
+            <a:off x="828446" y="64008"/>
+            <a:ext cx="8686800" cy="182880"/>
           </a:xfrm>
           <a:prstGeom prst="rect">
             <a:avLst/>
@@ -12058,8 +12305,9 @@
             <a:r>
               <a:rPr sz="900" b="1" i="0">
                 <a:solidFill>
-                  <a:srgbClr val="55657A"/>
-                </a:solidFill>
+                  <a:srgbClr val="888888"/>
+                </a:solidFill>
+                <a:latin typeface="Meiryo UI"/>
               </a:rPr>
               <a:t>3.1</a:t>
             </a:r>
@@ -12074,8 +12322,8 @@
         </p:nvSpPr>
         <p:spPr>
           <a:xfrm>
-            <a:off x="457200" y="246888"/>
-            <a:ext cx="9491472" cy="566928"/>
+            <a:off x="828446" y="252374"/>
+            <a:ext cx="8686800" cy="288036"/>
           </a:xfrm>
           <a:prstGeom prst="rect">
             <a:avLst/>
@@ -12089,10 +12337,11 @@
           <a:lstStyle/>
           <a:p>
             <a:r>
-              <a:rPr sz="2600" b="1" i="0">
+              <a:rPr sz="2100" b="1" i="0">
                 <a:solidFill>
                   <a:srgbClr val="1A1A1A"/>
                 </a:solidFill>
+                <a:latin typeface="Meiryo UI"/>
               </a:rPr>
               <a:t>3つの戦略柱</a:t>
             </a:r>
@@ -12107,14 +12356,14 @@
         </p:nvSpPr>
         <p:spPr>
           <a:xfrm>
-            <a:off x="0" y="758952"/>
-            <a:ext cx="12188952" cy="22860"/>
+            <a:off x="838504" y="630021"/>
+            <a:ext cx="10515600" cy="19050"/>
           </a:xfrm>
           <a:prstGeom prst="rect">
             <a:avLst/>
           </a:prstGeom>
           <a:solidFill>
-            <a:srgbClr val="000000"/>
+            <a:srgbClr val="1A1A1A"/>
           </a:solidFill>
           <a:ln>
             <a:noFill/>
@@ -12151,8 +12400,8 @@
         </p:nvSpPr>
         <p:spPr>
           <a:xfrm>
-            <a:off x="457200" y="923544"/>
-            <a:ext cx="11411712" cy="548640"/>
+            <a:off x="838504" y="640080"/>
+            <a:ext cx="10515600" cy="629107"/>
           </a:xfrm>
           <a:prstGeom prst="rect">
             <a:avLst/>
@@ -12166,10 +12415,11 @@
           <a:lstStyle/>
           <a:p>
             <a:r>
-              <a:rPr sz="1200" b="0" i="0">
+              <a:rPr sz="1800" b="0" i="0">
                 <a:solidFill>
                   <a:srgbClr val="1A1A1A"/>
                 </a:solidFill>
+                <a:latin typeface="Meiryo UI"/>
               </a:rPr>
               <a:t>獲得・育成・維持の3軸でリソースを最適配分します。</a:t>
             </a:r>
@@ -12184,8 +12434,8 @@
         </p:nvSpPr>
         <p:spPr>
           <a:xfrm>
-            <a:off x="457200" y="1517904"/>
-            <a:ext cx="11411712" cy="4864608"/>
+            <a:off x="838504" y="1280160"/>
+            <a:ext cx="10515600" cy="4984394"/>
           </a:xfrm>
           <a:prstGeom prst="rect">
             <a:avLst/>
@@ -12207,18 +12457,20 @@
               </a:spcAft>
             </a:pPr>
             <a:r>
-              <a:rPr sz="1300" b="1" i="0">
-                <a:solidFill>
-                  <a:srgbClr val="1B4FA8"/>
-                </a:solidFill>
+              <a:rPr sz="1600" b="1" i="0">
+                <a:solidFill>
+                  <a:srgbClr val="0066CD"/>
+                </a:solidFill>
+                <a:latin typeface="Meiryo UI"/>
               </a:rPr>
               <a:t>1. </a:t>
             </a:r>
             <a:r>
-              <a:rPr sz="1300" b="0" i="0">
+              <a:rPr sz="1600" b="0" i="0">
                 <a:solidFill>
                   <a:srgbClr val="1A1A1A"/>
                 </a:solidFill>
+                <a:latin typeface="Meiryo UI"/>
               </a:rPr>
               <a:t>新規顧客獲得（Acquire）</a:t>
             </a:r>
@@ -12233,18 +12485,20 @@
               </a:spcAft>
             </a:pPr>
             <a:r>
-              <a:rPr sz="1000" b="0" i="0">
-                <a:solidFill>
-                  <a:srgbClr val="808080"/>
-                </a:solidFill>
+              <a:rPr sz="1400" b="0" i="0">
+                <a:solidFill>
+                  <a:srgbClr val="888888"/>
+                </a:solidFill>
+                <a:latin typeface="Meiryo UI"/>
               </a:rPr>
               <a:t>      – </a:t>
             </a:r>
             <a:r>
-              <a:rPr sz="1100" b="0" i="0">
+              <a:rPr sz="1400" b="0" i="0">
                 <a:solidFill>
                   <a:srgbClr val="1A1A1A"/>
                 </a:solidFill>
+                <a:latin typeface="Meiryo UI"/>
               </a:rPr>
               <a:t>インバウンドマーケティングの強化</a:t>
             </a:r>
@@ -12259,18 +12513,20 @@
               </a:spcAft>
             </a:pPr>
             <a:r>
-              <a:rPr sz="1000" b="0" i="0">
-                <a:solidFill>
-                  <a:srgbClr val="808080"/>
-                </a:solidFill>
+              <a:rPr sz="1400" b="0" i="0">
+                <a:solidFill>
+                  <a:srgbClr val="888888"/>
+                </a:solidFill>
+                <a:latin typeface="Meiryo UI"/>
               </a:rPr>
               <a:t>      – </a:t>
             </a:r>
             <a:r>
-              <a:rPr sz="1100" b="0" i="0">
+              <a:rPr sz="1400" b="0" i="0">
                 <a:solidFill>
                   <a:srgbClr val="1A1A1A"/>
                 </a:solidFill>
+                <a:latin typeface="Meiryo UI"/>
               </a:rPr>
               <a:t>アウトバウンドSDR体制の構築</a:t>
             </a:r>
@@ -12285,18 +12541,20 @@
               </a:spcAft>
             </a:pPr>
             <a:r>
-              <a:rPr sz="1300" b="1" i="0">
-                <a:solidFill>
-                  <a:srgbClr val="1B4FA8"/>
-                </a:solidFill>
+              <a:rPr sz="1600" b="1" i="0">
+                <a:solidFill>
+                  <a:srgbClr val="0066CD"/>
+                </a:solidFill>
+                <a:latin typeface="Meiryo UI"/>
               </a:rPr>
               <a:t>2. </a:t>
             </a:r>
             <a:r>
-              <a:rPr sz="1300" b="0" i="0">
+              <a:rPr sz="1600" b="0" i="0">
                 <a:solidFill>
                   <a:srgbClr val="1A1A1A"/>
                 </a:solidFill>
+                <a:latin typeface="Meiryo UI"/>
               </a:rPr>
               <a:t>顧客育成（Expand）</a:t>
             </a:r>
@@ -12311,18 +12569,20 @@
               </a:spcAft>
             </a:pPr>
             <a:r>
-              <a:rPr sz="1000" b="0" i="0">
-                <a:solidFill>
-                  <a:srgbClr val="808080"/>
-                </a:solidFill>
+              <a:rPr sz="1400" b="0" i="0">
+                <a:solidFill>
+                  <a:srgbClr val="888888"/>
+                </a:solidFill>
+                <a:latin typeface="Meiryo UI"/>
               </a:rPr>
               <a:t>      – </a:t>
             </a:r>
             <a:r>
-              <a:rPr sz="1100" b="0" i="0">
+              <a:rPr sz="1400" b="0" i="0">
                 <a:solidFill>
                   <a:srgbClr val="1A1A1A"/>
                 </a:solidFill>
+                <a:latin typeface="Meiryo UI"/>
               </a:rPr>
               <a:t>カスタマーサクセスチームの増強</a:t>
             </a:r>
@@ -12337,18 +12597,20 @@
               </a:spcAft>
             </a:pPr>
             <a:r>
-              <a:rPr sz="1000" b="0" i="0">
-                <a:solidFill>
-                  <a:srgbClr val="808080"/>
-                </a:solidFill>
+              <a:rPr sz="1400" b="0" i="0">
+                <a:solidFill>
+                  <a:srgbClr val="888888"/>
+                </a:solidFill>
+                <a:latin typeface="Meiryo UI"/>
               </a:rPr>
               <a:t>      – </a:t>
             </a:r>
             <a:r>
-              <a:rPr sz="1100" b="0" i="0">
+              <a:rPr sz="1400" b="0" i="0">
                 <a:solidFill>
                   <a:srgbClr val="1A1A1A"/>
                 </a:solidFill>
+                <a:latin typeface="Meiryo UI"/>
               </a:rPr>
               <a:t>アップセル・クロスセルプログラム</a:t>
             </a:r>
@@ -12363,18 +12625,20 @@
               </a:spcAft>
             </a:pPr>
             <a:r>
-              <a:rPr sz="1300" b="1" i="0">
-                <a:solidFill>
-                  <a:srgbClr val="1B4FA8"/>
-                </a:solidFill>
+              <a:rPr sz="1600" b="1" i="0">
+                <a:solidFill>
+                  <a:srgbClr val="0066CD"/>
+                </a:solidFill>
+                <a:latin typeface="Meiryo UI"/>
               </a:rPr>
               <a:t>3. </a:t>
             </a:r>
             <a:r>
-              <a:rPr sz="1300" b="0" i="0">
+              <a:rPr sz="1600" b="0" i="0">
                 <a:solidFill>
                   <a:srgbClr val="1A1A1A"/>
                 </a:solidFill>
+                <a:latin typeface="Meiryo UI"/>
               </a:rPr>
               <a:t>顧客維持（Retain）</a:t>
             </a:r>
@@ -12389,18 +12653,20 @@
               </a:spcAft>
             </a:pPr>
             <a:r>
-              <a:rPr sz="1000" b="0" i="0">
-                <a:solidFill>
-                  <a:srgbClr val="808080"/>
-                </a:solidFill>
+              <a:rPr sz="1400" b="0" i="0">
+                <a:solidFill>
+                  <a:srgbClr val="888888"/>
+                </a:solidFill>
+                <a:latin typeface="Meiryo UI"/>
               </a:rPr>
               <a:t>      – </a:t>
             </a:r>
             <a:r>
-              <a:rPr sz="1100" b="0" i="0">
+              <a:rPr sz="1400" b="0" i="0">
                 <a:solidFill>
                   <a:srgbClr val="1A1A1A"/>
                 </a:solidFill>
+                <a:latin typeface="Meiryo UI"/>
               </a:rPr>
               <a:t>チャーン予測モデルの導入</a:t>
             </a:r>
@@ -12415,18 +12681,20 @@
               </a:spcAft>
             </a:pPr>
             <a:r>
-              <a:rPr sz="1000" b="0" i="0">
-                <a:solidFill>
-                  <a:srgbClr val="808080"/>
-                </a:solidFill>
+              <a:rPr sz="1400" b="0" i="0">
+                <a:solidFill>
+                  <a:srgbClr val="888888"/>
+                </a:solidFill>
+                <a:latin typeface="Meiryo UI"/>
               </a:rPr>
               <a:t>      – </a:t>
             </a:r>
             <a:r>
-              <a:rPr sz="1100" b="0" i="0">
+              <a:rPr sz="1400" b="0" i="0">
                 <a:solidFill>
                   <a:srgbClr val="1A1A1A"/>
                 </a:solidFill>
+                <a:latin typeface="Meiryo UI"/>
               </a:rPr>
               <a:t>エンゲージメントスコアリング</a:t>
             </a:r>
@@ -12449,8 +12717,8 @@
         </p:blipFill>
         <p:spPr>
           <a:xfrm>
-            <a:off x="10040112" y="73152"/>
-            <a:ext cx="2011680" cy="625706"/>
+            <a:off x="9338767" y="83210"/>
+            <a:ext cx="2016252" cy="468172"/>
           </a:xfrm>
           <a:prstGeom prst="rect">
             <a:avLst/>
@@ -12465,14 +12733,14 @@
         </p:nvSpPr>
         <p:spPr>
           <a:xfrm>
-            <a:off x="0" y="6473952"/>
-            <a:ext cx="12188952" cy="15240"/>
+            <a:off x="838504" y="6355994"/>
+            <a:ext cx="10515600" cy="19050"/>
           </a:xfrm>
           <a:prstGeom prst="rect">
             <a:avLst/>
           </a:prstGeom>
           <a:solidFill>
-            <a:srgbClr val="000000"/>
+            <a:srgbClr val="1A1A1A"/>
           </a:solidFill>
           <a:ln>
             <a:noFill/>
@@ -12509,8 +12777,8 @@
         </p:nvSpPr>
         <p:spPr>
           <a:xfrm>
-            <a:off x="457200" y="6512052"/>
-            <a:ext cx="7315200" cy="320040"/>
+            <a:off x="838504" y="6400800"/>
+            <a:ext cx="6400800" cy="228600"/>
           </a:xfrm>
           <a:prstGeom prst="rect">
             <a:avLst/>
@@ -12524,12 +12792,13 @@
           <a:lstStyle/>
           <a:p>
             <a:r>
-              <a:rPr sz="800" b="0" i="0">
-                <a:solidFill>
-                  <a:srgbClr val="808080"/>
-                </a:solidFill>
-              </a:rPr>
-              <a:t>Confidential All Rights Reserved SALESCORE Inc.</a:t>
+              <a:rPr sz="900" b="0" i="0">
+                <a:solidFill>
+                  <a:srgbClr val="888888"/>
+                </a:solidFill>
+                <a:latin typeface="Meiryo UI"/>
+              </a:rPr>
+              <a:t>Confidential All Rights Reserved SALESCORE Co., Ltd.</a:t>
             </a:r>
           </a:p>
         </p:txBody>
@@ -12542,8 +12811,8 @@
         </p:nvSpPr>
         <p:spPr>
           <a:xfrm>
-            <a:off x="11640312" y="6512052"/>
-            <a:ext cx="411480" cy="320040"/>
+            <a:off x="10515600" y="6400800"/>
+            <a:ext cx="1371600" cy="228600"/>
           </a:xfrm>
           <a:prstGeom prst="rect">
             <a:avLst/>
@@ -12558,10 +12827,11 @@
           <a:p>
             <a:pPr algn="r"/>
             <a:r>
-              <a:rPr sz="900" b="0" i="0">
-                <a:solidFill>
-                  <a:srgbClr val="808080"/>
-                </a:solidFill>
+              <a:rPr sz="1200" b="0" i="0">
+                <a:solidFill>
+                  <a:srgbClr val="888888"/>
+                </a:solidFill>
+                <a:latin typeface="Meiryo UI"/>
               </a:rPr>
               <a:t>9</a:t>
             </a:r>

--- a/demo_sample.pptx
+++ b/demo_sample.pptx
@@ -3326,7 +3326,7 @@
         <p:spPr>
           <a:xfrm>
             <a:off x="9338767" y="83210"/>
-            <a:ext cx="2016252" cy="468172"/>
+            <a:ext cx="2016252" cy="627129"/>
           </a:xfrm>
           <a:prstGeom prst="rect">
             <a:avLst/>
@@ -4067,7 +4067,7 @@
         <p:spPr>
           <a:xfrm>
             <a:off x="9338767" y="83210"/>
-            <a:ext cx="2016252" cy="468172"/>
+            <a:ext cx="2016252" cy="627129"/>
           </a:xfrm>
           <a:prstGeom prst="rect">
             <a:avLst/>
@@ -4794,7 +4794,7 @@
         <p:spPr>
           <a:xfrm>
             <a:off x="9338767" y="83210"/>
-            <a:ext cx="2016252" cy="468172"/>
+            <a:ext cx="2016252" cy="627129"/>
           </a:xfrm>
           <a:prstGeom prst="rect">
             <a:avLst/>
@@ -5071,7 +5071,7 @@
         <p:spPr>
           <a:xfrm>
             <a:off x="9338767" y="83210"/>
-            <a:ext cx="2016252" cy="468172"/>
+            <a:ext cx="2016252" cy="627129"/>
           </a:xfrm>
           <a:prstGeom prst="rect">
             <a:avLst/>
@@ -5820,7 +5820,7 @@
         <p:spPr>
           <a:xfrm>
             <a:off x="9338767" y="83210"/>
-            <a:ext cx="2016252" cy="468172"/>
+            <a:ext cx="2016252" cy="627129"/>
           </a:xfrm>
           <a:prstGeom prst="rect">
             <a:avLst/>
@@ -6440,7 +6440,7 @@
         <p:spPr>
           <a:xfrm>
             <a:off x="9338767" y="83210"/>
-            <a:ext cx="2016252" cy="468172"/>
+            <a:ext cx="2016252" cy="627129"/>
           </a:xfrm>
           <a:prstGeom prst="rect">
             <a:avLst/>
@@ -6717,7 +6717,7 @@
         <p:spPr>
           <a:xfrm>
             <a:off x="9338767" y="83210"/>
-            <a:ext cx="2016252" cy="468172"/>
+            <a:ext cx="2016252" cy="627129"/>
           </a:xfrm>
           <a:prstGeom prst="rect">
             <a:avLst/>
@@ -7197,7 +7197,7 @@
         <p:spPr>
           <a:xfrm>
             <a:off x="9338767" y="83210"/>
-            <a:ext cx="2016252" cy="468172"/>
+            <a:ext cx="2016252" cy="627129"/>
           </a:xfrm>
           <a:prstGeom prst="rect">
             <a:avLst/>
@@ -8114,7 +8114,7 @@
         <p:spPr>
           <a:xfrm>
             <a:off x="9338767" y="83210"/>
-            <a:ext cx="2016252" cy="468172"/>
+            <a:ext cx="2016252" cy="627129"/>
           </a:xfrm>
           <a:prstGeom prst="rect">
             <a:avLst/>
@@ -8391,7 +8391,7 @@
         <p:spPr>
           <a:xfrm>
             <a:off x="9338767" y="83210"/>
-            <a:ext cx="2016252" cy="468172"/>
+            <a:ext cx="2016252" cy="627129"/>
           </a:xfrm>
           <a:prstGeom prst="rect">
             <a:avLst/>
@@ -8843,7 +8843,7 @@
         <p:spPr>
           <a:xfrm>
             <a:off x="9338767" y="83210"/>
-            <a:ext cx="2016252" cy="468172"/>
+            <a:ext cx="2016252" cy="627129"/>
           </a:xfrm>
           <a:prstGeom prst="rect">
             <a:avLst/>
@@ -9802,7 +9802,7 @@
         <p:spPr>
           <a:xfrm>
             <a:off x="9338767" y="83210"/>
-            <a:ext cx="2016252" cy="468172"/>
+            <a:ext cx="2016252" cy="627129"/>
           </a:xfrm>
           <a:prstGeom prst="rect">
             <a:avLst/>
@@ -10079,7 +10079,7 @@
         <p:spPr>
           <a:xfrm>
             <a:off x="9338767" y="83210"/>
-            <a:ext cx="2016252" cy="468172"/>
+            <a:ext cx="2016252" cy="627129"/>
           </a:xfrm>
           <a:prstGeom prst="rect">
             <a:avLst/>
@@ -10862,7 +10862,7 @@
         <p:spPr>
           <a:xfrm>
             <a:off x="9338767" y="83210"/>
-            <a:ext cx="2016252" cy="468172"/>
+            <a:ext cx="2016252" cy="627129"/>
           </a:xfrm>
           <a:prstGeom prst="rect">
             <a:avLst/>
@@ -11821,7 +11821,7 @@
         <p:spPr>
           <a:xfrm>
             <a:off x="9338767" y="83210"/>
-            <a:ext cx="2016252" cy="468172"/>
+            <a:ext cx="2016252" cy="627129"/>
           </a:xfrm>
           <a:prstGeom prst="rect">
             <a:avLst/>
@@ -12098,7 +12098,7 @@
         <p:spPr>
           <a:xfrm>
             <a:off x="9338767" y="83210"/>
-            <a:ext cx="2016252" cy="468172"/>
+            <a:ext cx="2016252" cy="627129"/>
           </a:xfrm>
           <a:prstGeom prst="rect">
             <a:avLst/>
@@ -12718,7 +12718,7 @@
         <p:spPr>
           <a:xfrm>
             <a:off x="9338767" y="83210"/>
-            <a:ext cx="2016252" cy="468172"/>
+            <a:ext cx="2016252" cy="627129"/>
           </a:xfrm>
           <a:prstGeom prst="rect">
             <a:avLst/>
